--- a/docs/开题展示.pptx
+++ b/docs/开题展示.pptx
@@ -5,20 +5,20 @@
     <p:sldMasterId id="2147483648" r:id="rId1"/>
   </p:sldMasterIdLst>
   <p:sldIdLst>
-    <p:sldId id="256" r:id="rId7"/>
-    <p:sldId id="257" r:id="rId8"/>
-    <p:sldId id="258" r:id="rId9"/>
-    <p:sldId id="259" r:id="rId10"/>
-    <p:sldId id="260" r:id="rId11"/>
-    <p:sldId id="261" r:id="rId12"/>
-    <p:sldId id="262" r:id="rId13"/>
-    <p:sldId id="263" r:id="rId14"/>
-    <p:sldId id="264" r:id="rId15"/>
-    <p:sldId id="265" r:id="rId16"/>
-    <p:sldId id="266" r:id="rId17"/>
-    <p:sldId id="267" r:id="rId18"/>
+    <p:sldId id="256" r:id="rId2"/>
+    <p:sldId id="257" r:id="rId3"/>
+    <p:sldId id="258" r:id="rId4"/>
+    <p:sldId id="259" r:id="rId5"/>
+    <p:sldId id="260" r:id="rId6"/>
+    <p:sldId id="261" r:id="rId7"/>
+    <p:sldId id="262" r:id="rId8"/>
+    <p:sldId id="263" r:id="rId9"/>
+    <p:sldId id="264" r:id="rId10"/>
+    <p:sldId id="265" r:id="rId11"/>
+    <p:sldId id="266" r:id="rId12"/>
+    <p:sldId id="267" r:id="rId13"/>
   </p:sldIdLst>
-  <p:sldSz cx="12191695" cy="6858000" type="screen4x3"/>
+  <p:sldSz cx="12192000" cy="6858000"/>
   <p:notesSz cx="6858000" cy="9144000"/>
   <p:defaultTextStyle>
     <a:defPPr>
@@ -115,6 +115,22 @@
       </a:defRPr>
     </a:lvl9pPr>
   </p:defaultTextStyle>
+  <p:extLst>
+    <p:ext uri="{EFAFB233-063F-42B5-8137-9DF3F51BA10A}">
+      <p15:sldGuideLst xmlns:p15="http://schemas.microsoft.com/office/powerpoint/2012/main">
+        <p15:guide id="1" orient="horz" pos="2160">
+          <p15:clr>
+            <a:srgbClr val="A4A3A4"/>
+          </p15:clr>
+        </p15:guide>
+        <p15:guide id="2" pos="2880">
+          <p15:clr>
+            <a:srgbClr val="A4A3A4"/>
+          </p15:clr>
+        </p15:guide>
+      </p15:sldGuideLst>
+    </p:ext>
+  </p:extLst>
 </p:presentation>
 </file>
 
@@ -156,10 +172,9 @@
           <a:lstStyle/>
           <a:p>
             <a:r>
-              <a:rPr lang="en-US" smtClean="0"/>
+              <a:rPr lang="en-US"/>
               <a:t>Click to edit Master title style</a:t>
             </a:r>
-            <a:endParaRPr lang="en-US"/>
           </a:p>
         </p:txBody>
       </p:sp>
@@ -275,10 +290,9 @@
           </a:lstStyle>
           <a:p>
             <a:r>
-              <a:rPr lang="en-US" smtClean="0"/>
+              <a:rPr lang="en-US"/>
               <a:t>Click to edit Master subtitle style</a:t>
             </a:r>
-            <a:endParaRPr lang="en-US"/>
           </a:p>
         </p:txBody>
       </p:sp>
@@ -299,7 +313,7 @@
           <a:p>
             <a:fld id="{5BCAD085-E8A6-8845-BD4E-CB4CCA059FC4}" type="datetimeFigureOut">
               <a:rPr lang="en-US" smtClean="0"/>
-              <a:t>1/27/13</a:t>
+              <a:t>5/5/2026</a:t>
             </a:fld>
             <a:endParaRPr lang="en-US"/>
           </a:p>
@@ -393,10 +407,9 @@
           <a:lstStyle/>
           <a:p>
             <a:r>
-              <a:rPr lang="en-US" smtClean="0"/>
+              <a:rPr lang="en-US"/>
               <a:t>Click to edit Master title style</a:t>
             </a:r>
-            <a:endParaRPr lang="en-US"/>
           </a:p>
         </p:txBody>
       </p:sp>
@@ -417,38 +430,37 @@
           <a:p>
             <a:pPr lvl="0"/>
             <a:r>
-              <a:rPr lang="en-US" smtClean="0"/>
+              <a:rPr lang="en-US"/>
               <a:t>Click to edit Master text styles</a:t>
             </a:r>
           </a:p>
           <a:p>
             <a:pPr lvl="1"/>
             <a:r>
-              <a:rPr lang="en-US" smtClean="0"/>
+              <a:rPr lang="en-US"/>
               <a:t>Second level</a:t>
             </a:r>
           </a:p>
           <a:p>
             <a:pPr lvl="2"/>
             <a:r>
-              <a:rPr lang="en-US" smtClean="0"/>
+              <a:rPr lang="en-US"/>
               <a:t>Third level</a:t>
             </a:r>
           </a:p>
           <a:p>
             <a:pPr lvl="3"/>
             <a:r>
-              <a:rPr lang="en-US" smtClean="0"/>
+              <a:rPr lang="en-US"/>
               <a:t>Fourth level</a:t>
             </a:r>
           </a:p>
           <a:p>
             <a:pPr lvl="4"/>
             <a:r>
-              <a:rPr lang="en-US" smtClean="0"/>
+              <a:rPr lang="en-US"/>
               <a:t>Fifth level</a:t>
             </a:r>
-            <a:endParaRPr lang="en-US"/>
           </a:p>
         </p:txBody>
       </p:sp>
@@ -469,7 +481,7 @@
           <a:p>
             <a:fld id="{5BCAD085-E8A6-8845-BD4E-CB4CCA059FC4}" type="datetimeFigureOut">
               <a:rPr lang="en-US" smtClean="0"/>
-              <a:t>1/27/13</a:t>
+              <a:t>5/5/2026</a:t>
             </a:fld>
             <a:endParaRPr lang="en-US"/>
           </a:p>
@@ -568,10 +580,9 @@
           <a:lstStyle/>
           <a:p>
             <a:r>
-              <a:rPr lang="en-US" smtClean="0"/>
+              <a:rPr lang="en-US"/>
               <a:t>Click to edit Master title style</a:t>
             </a:r>
-            <a:endParaRPr lang="en-US"/>
           </a:p>
         </p:txBody>
       </p:sp>
@@ -597,38 +608,37 @@
           <a:p>
             <a:pPr lvl="0"/>
             <a:r>
-              <a:rPr lang="en-US" smtClean="0"/>
+              <a:rPr lang="en-US"/>
               <a:t>Click to edit Master text styles</a:t>
             </a:r>
           </a:p>
           <a:p>
             <a:pPr lvl="1"/>
             <a:r>
-              <a:rPr lang="en-US" smtClean="0"/>
+              <a:rPr lang="en-US"/>
               <a:t>Second level</a:t>
             </a:r>
           </a:p>
           <a:p>
             <a:pPr lvl="2"/>
             <a:r>
-              <a:rPr lang="en-US" smtClean="0"/>
+              <a:rPr lang="en-US"/>
               <a:t>Third level</a:t>
             </a:r>
           </a:p>
           <a:p>
             <a:pPr lvl="3"/>
             <a:r>
-              <a:rPr lang="en-US" smtClean="0"/>
+              <a:rPr lang="en-US"/>
               <a:t>Fourth level</a:t>
             </a:r>
           </a:p>
           <a:p>
             <a:pPr lvl="4"/>
             <a:r>
-              <a:rPr lang="en-US" smtClean="0"/>
+              <a:rPr lang="en-US"/>
               <a:t>Fifth level</a:t>
             </a:r>
-            <a:endParaRPr lang="en-US"/>
           </a:p>
         </p:txBody>
       </p:sp>
@@ -649,7 +659,7 @@
           <a:p>
             <a:fld id="{5BCAD085-E8A6-8845-BD4E-CB4CCA059FC4}" type="datetimeFigureOut">
               <a:rPr lang="en-US" smtClean="0"/>
-              <a:t>1/27/13</a:t>
+              <a:t>5/5/2026</a:t>
             </a:fld>
             <a:endParaRPr lang="en-US"/>
           </a:p>
@@ -743,10 +753,9 @@
           <a:lstStyle/>
           <a:p>
             <a:r>
-              <a:rPr lang="en-US" smtClean="0"/>
+              <a:rPr lang="en-US"/>
               <a:t>Click to edit Master title style</a:t>
             </a:r>
-            <a:endParaRPr lang="en-US"/>
           </a:p>
         </p:txBody>
       </p:sp>
@@ -767,38 +776,37 @@
           <a:p>
             <a:pPr lvl="0"/>
             <a:r>
-              <a:rPr lang="en-US" smtClean="0"/>
+              <a:rPr lang="en-US"/>
               <a:t>Click to edit Master text styles</a:t>
             </a:r>
           </a:p>
           <a:p>
             <a:pPr lvl="1"/>
             <a:r>
-              <a:rPr lang="en-US" smtClean="0"/>
+              <a:rPr lang="en-US"/>
               <a:t>Second level</a:t>
             </a:r>
           </a:p>
           <a:p>
             <a:pPr lvl="2"/>
             <a:r>
-              <a:rPr lang="en-US" smtClean="0"/>
+              <a:rPr lang="en-US"/>
               <a:t>Third level</a:t>
             </a:r>
           </a:p>
           <a:p>
             <a:pPr lvl="3"/>
             <a:r>
-              <a:rPr lang="en-US" smtClean="0"/>
+              <a:rPr lang="en-US"/>
               <a:t>Fourth level</a:t>
             </a:r>
           </a:p>
           <a:p>
             <a:pPr lvl="4"/>
             <a:r>
-              <a:rPr lang="en-US" smtClean="0"/>
+              <a:rPr lang="en-US"/>
               <a:t>Fifth level</a:t>
             </a:r>
-            <a:endParaRPr lang="en-US"/>
           </a:p>
         </p:txBody>
       </p:sp>
@@ -819,7 +827,7 @@
           <a:p>
             <a:fld id="{5BCAD085-E8A6-8845-BD4E-CB4CCA059FC4}" type="datetimeFigureOut">
               <a:rPr lang="en-US" smtClean="0"/>
-              <a:t>1/27/13</a:t>
+              <a:t>5/5/2026</a:t>
             </a:fld>
             <a:endParaRPr lang="en-US"/>
           </a:p>
@@ -922,10 +930,9 @@
           </a:lstStyle>
           <a:p>
             <a:r>
-              <a:rPr lang="en-US" smtClean="0"/>
+              <a:rPr lang="en-US"/>
               <a:t>Click to edit Master title style</a:t>
             </a:r>
-            <a:endParaRPr lang="en-US"/>
           </a:p>
         </p:txBody>
       </p:sp>
@@ -1042,7 +1049,7 @@
           <a:p>
             <a:pPr lvl="0"/>
             <a:r>
-              <a:rPr lang="en-US" smtClean="0"/>
+              <a:rPr lang="en-US"/>
               <a:t>Click to edit Master text styles</a:t>
             </a:r>
           </a:p>
@@ -1065,7 +1072,7 @@
           <a:p>
             <a:fld id="{5BCAD085-E8A6-8845-BD4E-CB4CCA059FC4}" type="datetimeFigureOut">
               <a:rPr lang="en-US" smtClean="0"/>
-              <a:t>1/27/13</a:t>
+              <a:t>5/5/2026</a:t>
             </a:fld>
             <a:endParaRPr lang="en-US"/>
           </a:p>
@@ -1159,10 +1166,9 @@
           <a:lstStyle/>
           <a:p>
             <a:r>
-              <a:rPr lang="en-US" smtClean="0"/>
+              <a:rPr lang="en-US"/>
               <a:t>Click to edit Master title style</a:t>
             </a:r>
-            <a:endParaRPr lang="en-US"/>
           </a:p>
         </p:txBody>
       </p:sp>
@@ -1216,38 +1222,37 @@
           <a:p>
             <a:pPr lvl="0"/>
             <a:r>
-              <a:rPr lang="en-US" smtClean="0"/>
+              <a:rPr lang="en-US"/>
               <a:t>Click to edit Master text styles</a:t>
             </a:r>
           </a:p>
           <a:p>
             <a:pPr lvl="1"/>
             <a:r>
-              <a:rPr lang="en-US" smtClean="0"/>
+              <a:rPr lang="en-US"/>
               <a:t>Second level</a:t>
             </a:r>
           </a:p>
           <a:p>
             <a:pPr lvl="2"/>
             <a:r>
-              <a:rPr lang="en-US" smtClean="0"/>
+              <a:rPr lang="en-US"/>
               <a:t>Third level</a:t>
             </a:r>
           </a:p>
           <a:p>
             <a:pPr lvl="3"/>
             <a:r>
-              <a:rPr lang="en-US" smtClean="0"/>
+              <a:rPr lang="en-US"/>
               <a:t>Fourth level</a:t>
             </a:r>
           </a:p>
           <a:p>
             <a:pPr lvl="4"/>
             <a:r>
-              <a:rPr lang="en-US" smtClean="0"/>
+              <a:rPr lang="en-US"/>
               <a:t>Fifth level</a:t>
             </a:r>
-            <a:endParaRPr lang="en-US"/>
           </a:p>
         </p:txBody>
       </p:sp>
@@ -1301,38 +1306,37 @@
           <a:p>
             <a:pPr lvl="0"/>
             <a:r>
-              <a:rPr lang="en-US" smtClean="0"/>
+              <a:rPr lang="en-US"/>
               <a:t>Click to edit Master text styles</a:t>
             </a:r>
           </a:p>
           <a:p>
             <a:pPr lvl="1"/>
             <a:r>
-              <a:rPr lang="en-US" smtClean="0"/>
+              <a:rPr lang="en-US"/>
               <a:t>Second level</a:t>
             </a:r>
           </a:p>
           <a:p>
             <a:pPr lvl="2"/>
             <a:r>
-              <a:rPr lang="en-US" smtClean="0"/>
+              <a:rPr lang="en-US"/>
               <a:t>Third level</a:t>
             </a:r>
           </a:p>
           <a:p>
             <a:pPr lvl="3"/>
             <a:r>
-              <a:rPr lang="en-US" smtClean="0"/>
+              <a:rPr lang="en-US"/>
               <a:t>Fourth level</a:t>
             </a:r>
           </a:p>
           <a:p>
             <a:pPr lvl="4"/>
             <a:r>
-              <a:rPr lang="en-US" smtClean="0"/>
+              <a:rPr lang="en-US"/>
               <a:t>Fifth level</a:t>
             </a:r>
-            <a:endParaRPr lang="en-US"/>
           </a:p>
         </p:txBody>
       </p:sp>
@@ -1353,7 +1357,7 @@
           <a:p>
             <a:fld id="{5BCAD085-E8A6-8845-BD4E-CB4CCA059FC4}" type="datetimeFigureOut">
               <a:rPr lang="en-US" smtClean="0"/>
-              <a:t>1/27/13</a:t>
+              <a:t>5/5/2026</a:t>
             </a:fld>
             <a:endParaRPr lang="en-US"/>
           </a:p>
@@ -1451,10 +1455,9 @@
           </a:lstStyle>
           <a:p>
             <a:r>
-              <a:rPr lang="en-US" smtClean="0"/>
+              <a:rPr lang="en-US"/>
               <a:t>Click to edit Master title style</a:t>
             </a:r>
-            <a:endParaRPr lang="en-US"/>
           </a:p>
         </p:txBody>
       </p:sp>
@@ -1517,7 +1520,7 @@
           <a:p>
             <a:pPr lvl="0"/>
             <a:r>
-              <a:rPr lang="en-US" smtClean="0"/>
+              <a:rPr lang="en-US"/>
               <a:t>Click to edit Master text styles</a:t>
             </a:r>
           </a:p>
@@ -1573,38 +1576,37 @@
           <a:p>
             <a:pPr lvl="0"/>
             <a:r>
-              <a:rPr lang="en-US" smtClean="0"/>
+              <a:rPr lang="en-US"/>
               <a:t>Click to edit Master text styles</a:t>
             </a:r>
           </a:p>
           <a:p>
             <a:pPr lvl="1"/>
             <a:r>
-              <a:rPr lang="en-US" smtClean="0"/>
+              <a:rPr lang="en-US"/>
               <a:t>Second level</a:t>
             </a:r>
           </a:p>
           <a:p>
             <a:pPr lvl="2"/>
             <a:r>
-              <a:rPr lang="en-US" smtClean="0"/>
+              <a:rPr lang="en-US"/>
               <a:t>Third level</a:t>
             </a:r>
           </a:p>
           <a:p>
             <a:pPr lvl="3"/>
             <a:r>
-              <a:rPr lang="en-US" smtClean="0"/>
+              <a:rPr lang="en-US"/>
               <a:t>Fourth level</a:t>
             </a:r>
           </a:p>
           <a:p>
             <a:pPr lvl="4"/>
             <a:r>
-              <a:rPr lang="en-US" smtClean="0"/>
+              <a:rPr lang="en-US"/>
               <a:t>Fifth level</a:t>
             </a:r>
-            <a:endParaRPr lang="en-US"/>
           </a:p>
         </p:txBody>
       </p:sp>
@@ -1667,7 +1669,7 @@
           <a:p>
             <a:pPr lvl="0"/>
             <a:r>
-              <a:rPr lang="en-US" smtClean="0"/>
+              <a:rPr lang="en-US"/>
               <a:t>Click to edit Master text styles</a:t>
             </a:r>
           </a:p>
@@ -1723,38 +1725,37 @@
           <a:p>
             <a:pPr lvl="0"/>
             <a:r>
-              <a:rPr lang="en-US" smtClean="0"/>
+              <a:rPr lang="en-US"/>
               <a:t>Click to edit Master text styles</a:t>
             </a:r>
           </a:p>
           <a:p>
             <a:pPr lvl="1"/>
             <a:r>
-              <a:rPr lang="en-US" smtClean="0"/>
+              <a:rPr lang="en-US"/>
               <a:t>Second level</a:t>
             </a:r>
           </a:p>
           <a:p>
             <a:pPr lvl="2"/>
             <a:r>
-              <a:rPr lang="en-US" smtClean="0"/>
+              <a:rPr lang="en-US"/>
               <a:t>Third level</a:t>
             </a:r>
           </a:p>
           <a:p>
             <a:pPr lvl="3"/>
             <a:r>
-              <a:rPr lang="en-US" smtClean="0"/>
+              <a:rPr lang="en-US"/>
               <a:t>Fourth level</a:t>
             </a:r>
           </a:p>
           <a:p>
             <a:pPr lvl="4"/>
             <a:r>
-              <a:rPr lang="en-US" smtClean="0"/>
+              <a:rPr lang="en-US"/>
               <a:t>Fifth level</a:t>
             </a:r>
-            <a:endParaRPr lang="en-US"/>
           </a:p>
         </p:txBody>
       </p:sp>
@@ -1775,7 +1776,7 @@
           <a:p>
             <a:fld id="{5BCAD085-E8A6-8845-BD4E-CB4CCA059FC4}" type="datetimeFigureOut">
               <a:rPr lang="en-US" smtClean="0"/>
-              <a:t>1/27/13</a:t>
+              <a:t>5/5/2026</a:t>
             </a:fld>
             <a:endParaRPr lang="en-US"/>
           </a:p>
@@ -1869,10 +1870,9 @@
           <a:lstStyle/>
           <a:p>
             <a:r>
-              <a:rPr lang="en-US" smtClean="0"/>
+              <a:rPr lang="en-US"/>
               <a:t>Click to edit Master title style</a:t>
             </a:r>
-            <a:endParaRPr lang="en-US"/>
           </a:p>
         </p:txBody>
       </p:sp>
@@ -1893,7 +1893,7 @@
           <a:p>
             <a:fld id="{5BCAD085-E8A6-8845-BD4E-CB4CCA059FC4}" type="datetimeFigureOut">
               <a:rPr lang="en-US" smtClean="0"/>
-              <a:t>1/27/13</a:t>
+              <a:t>5/5/2026</a:t>
             </a:fld>
             <a:endParaRPr lang="en-US"/>
           </a:p>
@@ -1988,7 +1988,7 @@
           <a:p>
             <a:fld id="{5BCAD085-E8A6-8845-BD4E-CB4CCA059FC4}" type="datetimeFigureOut">
               <a:rPr lang="en-US" smtClean="0"/>
-              <a:t>1/27/13</a:t>
+              <a:t>5/5/2026</a:t>
             </a:fld>
             <a:endParaRPr lang="en-US"/>
           </a:p>
@@ -2091,10 +2091,9 @@
           </a:lstStyle>
           <a:p>
             <a:r>
-              <a:rPr lang="en-US" smtClean="0"/>
+              <a:rPr lang="en-US"/>
               <a:t>Click to edit Master title style</a:t>
             </a:r>
-            <a:endParaRPr lang="en-US"/>
           </a:p>
         </p:txBody>
       </p:sp>
@@ -2148,38 +2147,37 @@
           <a:p>
             <a:pPr lvl="0"/>
             <a:r>
-              <a:rPr lang="en-US" smtClean="0"/>
+              <a:rPr lang="en-US"/>
               <a:t>Click to edit Master text styles</a:t>
             </a:r>
           </a:p>
           <a:p>
             <a:pPr lvl="1"/>
             <a:r>
-              <a:rPr lang="en-US" smtClean="0"/>
+              <a:rPr lang="en-US"/>
               <a:t>Second level</a:t>
             </a:r>
           </a:p>
           <a:p>
             <a:pPr lvl="2"/>
             <a:r>
-              <a:rPr lang="en-US" smtClean="0"/>
+              <a:rPr lang="en-US"/>
               <a:t>Third level</a:t>
             </a:r>
           </a:p>
           <a:p>
             <a:pPr lvl="3"/>
             <a:r>
-              <a:rPr lang="en-US" smtClean="0"/>
+              <a:rPr lang="en-US"/>
               <a:t>Fourth level</a:t>
             </a:r>
           </a:p>
           <a:p>
             <a:pPr lvl="4"/>
             <a:r>
-              <a:rPr lang="en-US" smtClean="0"/>
+              <a:rPr lang="en-US"/>
               <a:t>Fifth level</a:t>
             </a:r>
-            <a:endParaRPr lang="en-US"/>
           </a:p>
         </p:txBody>
       </p:sp>
@@ -2242,7 +2240,7 @@
           <a:p>
             <a:pPr lvl="0"/>
             <a:r>
-              <a:rPr lang="en-US" smtClean="0"/>
+              <a:rPr lang="en-US"/>
               <a:t>Click to edit Master text styles</a:t>
             </a:r>
           </a:p>
@@ -2265,7 +2263,7 @@
           <a:p>
             <a:fld id="{5BCAD085-E8A6-8845-BD4E-CB4CCA059FC4}" type="datetimeFigureOut">
               <a:rPr lang="en-US" smtClean="0"/>
-              <a:t>1/27/13</a:t>
+              <a:t>5/5/2026</a:t>
             </a:fld>
             <a:endParaRPr lang="en-US"/>
           </a:p>
@@ -2368,10 +2366,9 @@
           </a:lstStyle>
           <a:p>
             <a:r>
-              <a:rPr lang="en-US" smtClean="0"/>
+              <a:rPr lang="en-US"/>
               <a:t>Click to edit Master title style</a:t>
             </a:r>
-            <a:endParaRPr lang="en-US"/>
           </a:p>
         </p:txBody>
       </p:sp>
@@ -2495,7 +2492,7 @@
           <a:p>
             <a:pPr lvl="0"/>
             <a:r>
-              <a:rPr lang="en-US" smtClean="0"/>
+              <a:rPr lang="en-US"/>
               <a:t>Click to edit Master text styles</a:t>
             </a:r>
           </a:p>
@@ -2518,7 +2515,7 @@
           <a:p>
             <a:fld id="{5BCAD085-E8A6-8845-BD4E-CB4CCA059FC4}" type="datetimeFigureOut">
               <a:rPr lang="en-US" smtClean="0"/>
-              <a:t>1/27/13</a:t>
+              <a:t>5/5/2026</a:t>
             </a:fld>
             <a:endParaRPr lang="en-US"/>
           </a:p>
@@ -2627,10 +2624,9 @@
           <a:lstStyle/>
           <a:p>
             <a:r>
-              <a:rPr lang="en-US" smtClean="0"/>
+              <a:rPr lang="en-US"/>
               <a:t>Click to edit Master title style</a:t>
             </a:r>
-            <a:endParaRPr lang="en-US"/>
           </a:p>
         </p:txBody>
       </p:sp>
@@ -2661,38 +2657,37 @@
           <a:p>
             <a:pPr lvl="0"/>
             <a:r>
-              <a:rPr lang="en-US" smtClean="0"/>
+              <a:rPr lang="en-US"/>
               <a:t>Click to edit Master text styles</a:t>
             </a:r>
           </a:p>
           <a:p>
             <a:pPr lvl="1"/>
             <a:r>
-              <a:rPr lang="en-US" smtClean="0"/>
+              <a:rPr lang="en-US"/>
               <a:t>Second level</a:t>
             </a:r>
           </a:p>
           <a:p>
             <a:pPr lvl="2"/>
             <a:r>
-              <a:rPr lang="en-US" smtClean="0"/>
+              <a:rPr lang="en-US"/>
               <a:t>Third level</a:t>
             </a:r>
           </a:p>
           <a:p>
             <a:pPr lvl="3"/>
             <a:r>
-              <a:rPr lang="en-US" smtClean="0"/>
+              <a:rPr lang="en-US"/>
               <a:t>Fourth level</a:t>
             </a:r>
           </a:p>
           <a:p>
             <a:pPr lvl="4"/>
             <a:r>
-              <a:rPr lang="en-US" smtClean="0"/>
+              <a:rPr lang="en-US"/>
               <a:t>Fifth level</a:t>
             </a:r>
-            <a:endParaRPr lang="en-US"/>
           </a:p>
         </p:txBody>
       </p:sp>
@@ -2731,7 +2726,7 @@
           <a:p>
             <a:fld id="{5BCAD085-E8A6-8845-BD4E-CB4CCA059FC4}" type="datetimeFigureOut">
               <a:rPr lang="en-US" smtClean="0"/>
-              <a:t>1/27/13</a:t>
+              <a:t>5/5/2026</a:t>
             </a:fld>
             <a:endParaRPr lang="en-US"/>
           </a:p>
@@ -3090,7 +3085,7 @@
 </file>
 
 <file path=ppt/slides/slide1.xml><?xml version="1.0" encoding="utf-8"?>
-<p:sld xmlns:a="http://schemas.openxmlformats.org/drawingml/2006/main" xmlns:p="http://schemas.openxmlformats.org/presentationml/2006/main" xmlns:r="http://schemas.openxmlformats.org/officeDocument/2006/relationships">
+<p:sld xmlns:a="http://schemas.openxmlformats.org/drawingml/2006/main" xmlns:r="http://schemas.openxmlformats.org/officeDocument/2006/relationships" xmlns:p="http://schemas.openxmlformats.org/presentationml/2006/main">
   <p:cSld>
     <p:bg>
       <p:bgPr>
@@ -3106,7 +3101,14 @@
         <p:cNvGrpSpPr/>
         <p:nvPr/>
       </p:nvGrpSpPr>
-      <p:grpSpPr/>
+      <p:grpSpPr>
+        <a:xfrm>
+          <a:off x="0" y="0"/>
+          <a:ext cx="0" cy="0"/>
+          <a:chOff x="0" y="0"/>
+          <a:chExt cx="0" cy="0"/>
+        </a:xfrm>
+      </p:grpSpPr>
       <p:sp>
         <p:nvSpPr>
           <p:cNvPr id="2" name="Rectangle 1"/>
@@ -3147,6 +3149,7 @@
           <a:lstStyle/>
           <a:p>
             <a:pPr algn="ctr"/>
+            <a:endParaRPr/>
           </a:p>
         </p:txBody>
       </p:sp>
@@ -3302,6 +3305,7 @@
           <a:lstStyle/>
           <a:p>
             <a:pPr algn="ctr"/>
+            <a:endParaRPr/>
           </a:p>
         </p:txBody>
       </p:sp>
@@ -3350,7 +3354,7 @@
 </file>
 
 <file path=ppt/slides/slide10.xml><?xml version="1.0" encoding="utf-8"?>
-<p:sld xmlns:a="http://schemas.openxmlformats.org/drawingml/2006/main" xmlns:p="http://schemas.openxmlformats.org/presentationml/2006/main" xmlns:r="http://schemas.openxmlformats.org/officeDocument/2006/relationships">
+<p:sld xmlns:a="http://schemas.openxmlformats.org/drawingml/2006/main" xmlns:r="http://schemas.openxmlformats.org/officeDocument/2006/relationships" xmlns:p="http://schemas.openxmlformats.org/presentationml/2006/main">
   <p:cSld>
     <p:bg>
       <p:bgPr>
@@ -3366,7 +3370,14 @@
         <p:cNvGrpSpPr/>
         <p:nvPr/>
       </p:nvGrpSpPr>
-      <p:grpSpPr/>
+      <p:grpSpPr>
+        <a:xfrm>
+          <a:off x="0" y="0"/>
+          <a:ext cx="0" cy="0"/>
+          <a:chOff x="0" y="0"/>
+          <a:chExt cx="0" cy="0"/>
+        </a:xfrm>
+      </p:grpSpPr>
       <p:sp>
         <p:nvSpPr>
           <p:cNvPr id="2" name="TextBox 1"/>
@@ -3443,6 +3454,7 @@
           <a:lstStyle/>
           <a:p>
             <a:pPr algn="ctr"/>
+            <a:endParaRPr/>
           </a:p>
         </p:txBody>
       </p:sp>
@@ -3501,9 +3513,27 @@
                 <a:tableStyleId>{5C22544A-7EE6-4342-B048-85BDC9FD1C3A}</a:tableStyleId>
               </a:tblPr>
               <a:tblGrid>
-                <a:gridCol w="1371600"/>
-                <a:gridCol w="1828800"/>
-                <a:gridCol w="1371600"/>
+                <a:gridCol w="1371600">
+                  <a:extLst>
+                    <a:ext uri="{9D8B030D-6E8A-4147-A177-3AD203B41FA5}">
+                      <a16:colId xmlns:a16="http://schemas.microsoft.com/office/drawing/2014/main" val="20000"/>
+                    </a:ext>
+                  </a:extLst>
+                </a:gridCol>
+                <a:gridCol w="1828800">
+                  <a:extLst>
+                    <a:ext uri="{9D8B030D-6E8A-4147-A177-3AD203B41FA5}">
+                      <a16:colId xmlns:a16="http://schemas.microsoft.com/office/drawing/2014/main" val="20001"/>
+                    </a:ext>
+                  </a:extLst>
+                </a:gridCol>
+                <a:gridCol w="1371600">
+                  <a:extLst>
+                    <a:ext uri="{9D8B030D-6E8A-4147-A177-3AD203B41FA5}">
+                      <a16:colId xmlns:a16="http://schemas.microsoft.com/office/drawing/2014/main" val="20002"/>
+                    </a:ext>
+                  </a:extLst>
+                </a:gridCol>
               </a:tblGrid>
               <a:tr h="292608">
                 <a:tc>
@@ -3578,6 +3608,11 @@
                     </a:solidFill>
                   </a:tcPr>
                 </a:tc>
+                <a:extLst>
+                  <a:ext uri="{0D108BD9-81ED-4DB2-BD59-A6C34878D82A}">
+                    <a16:rowId xmlns:a16="http://schemas.microsoft.com/office/drawing/2014/main" val="10000"/>
+                  </a:ext>
+                </a:extLst>
               </a:tr>
               <a:tr h="292608">
                 <a:tc>
@@ -3652,6 +3687,11 @@
                     </a:solidFill>
                   </a:tcPr>
                 </a:tc>
+                <a:extLst>
+                  <a:ext uri="{0D108BD9-81ED-4DB2-BD59-A6C34878D82A}">
+                    <a16:rowId xmlns:a16="http://schemas.microsoft.com/office/drawing/2014/main" val="10001"/>
+                  </a:ext>
+                </a:extLst>
               </a:tr>
               <a:tr h="292608">
                 <a:tc>
@@ -3726,6 +3766,11 @@
                     </a:solidFill>
                   </a:tcPr>
                 </a:tc>
+                <a:extLst>
+                  <a:ext uri="{0D108BD9-81ED-4DB2-BD59-A6C34878D82A}">
+                    <a16:rowId xmlns:a16="http://schemas.microsoft.com/office/drawing/2014/main" val="10002"/>
+                  </a:ext>
+                </a:extLst>
               </a:tr>
               <a:tr h="292608">
                 <a:tc>
@@ -3800,6 +3845,11 @@
                     </a:solidFill>
                   </a:tcPr>
                 </a:tc>
+                <a:extLst>
+                  <a:ext uri="{0D108BD9-81ED-4DB2-BD59-A6C34878D82A}">
+                    <a16:rowId xmlns:a16="http://schemas.microsoft.com/office/drawing/2014/main" val="10003"/>
+                  </a:ext>
+                </a:extLst>
               </a:tr>
               <a:tr h="292608">
                 <a:tc>
@@ -3874,6 +3924,11 @@
                     </a:solidFill>
                   </a:tcPr>
                 </a:tc>
+                <a:extLst>
+                  <a:ext uri="{0D108BD9-81ED-4DB2-BD59-A6C34878D82A}">
+                    <a16:rowId xmlns:a16="http://schemas.microsoft.com/office/drawing/2014/main" val="10004"/>
+                  </a:ext>
+                </a:extLst>
               </a:tr>
             </a:tbl>
           </a:graphicData>
@@ -3919,6 +3974,7 @@
           <a:lstStyle/>
           <a:p>
             <a:pPr algn="ctr"/>
+            <a:endParaRPr/>
           </a:p>
         </p:txBody>
       </p:sp>
@@ -3977,9 +4033,27 @@
                 <a:tableStyleId>{5C22544A-7EE6-4342-B048-85BDC9FD1C3A}</a:tableStyleId>
               </a:tblPr>
               <a:tblGrid>
-                <a:gridCol w="1371600"/>
-                <a:gridCol w="1645920"/>
-                <a:gridCol w="1554480"/>
+                <a:gridCol w="1371600">
+                  <a:extLst>
+                    <a:ext uri="{9D8B030D-6E8A-4147-A177-3AD203B41FA5}">
+                      <a16:colId xmlns:a16="http://schemas.microsoft.com/office/drawing/2014/main" val="20000"/>
+                    </a:ext>
+                  </a:extLst>
+                </a:gridCol>
+                <a:gridCol w="1645920">
+                  <a:extLst>
+                    <a:ext uri="{9D8B030D-6E8A-4147-A177-3AD203B41FA5}">
+                      <a16:colId xmlns:a16="http://schemas.microsoft.com/office/drawing/2014/main" val="20001"/>
+                    </a:ext>
+                  </a:extLst>
+                </a:gridCol>
+                <a:gridCol w="1554480">
+                  <a:extLst>
+                    <a:ext uri="{9D8B030D-6E8A-4147-A177-3AD203B41FA5}">
+                      <a16:colId xmlns:a16="http://schemas.microsoft.com/office/drawing/2014/main" val="20002"/>
+                    </a:ext>
+                  </a:extLst>
+                </a:gridCol>
               </a:tblGrid>
               <a:tr h="320040">
                 <a:tc>
@@ -4054,6 +4128,11 @@
                     </a:solidFill>
                   </a:tcPr>
                 </a:tc>
+                <a:extLst>
+                  <a:ext uri="{0D108BD9-81ED-4DB2-BD59-A6C34878D82A}">
+                    <a16:rowId xmlns:a16="http://schemas.microsoft.com/office/drawing/2014/main" val="10000"/>
+                  </a:ext>
+                </a:extLst>
               </a:tr>
               <a:tr h="320040">
                 <a:tc>
@@ -4128,6 +4207,11 @@
                     </a:solidFill>
                   </a:tcPr>
                 </a:tc>
+                <a:extLst>
+                  <a:ext uri="{0D108BD9-81ED-4DB2-BD59-A6C34878D82A}">
+                    <a16:rowId xmlns:a16="http://schemas.microsoft.com/office/drawing/2014/main" val="10001"/>
+                  </a:ext>
+                </a:extLst>
               </a:tr>
               <a:tr h="320040">
                 <a:tc>
@@ -4202,6 +4286,11 @@
                     </a:solidFill>
                   </a:tcPr>
                 </a:tc>
+                <a:extLst>
+                  <a:ext uri="{0D108BD9-81ED-4DB2-BD59-A6C34878D82A}">
+                    <a16:rowId xmlns:a16="http://schemas.microsoft.com/office/drawing/2014/main" val="10002"/>
+                  </a:ext>
+                </a:extLst>
               </a:tr>
               <a:tr h="320040">
                 <a:tc>
@@ -4276,6 +4365,11 @@
                     </a:solidFill>
                   </a:tcPr>
                 </a:tc>
+                <a:extLst>
+                  <a:ext uri="{0D108BD9-81ED-4DB2-BD59-A6C34878D82A}">
+                    <a16:rowId xmlns:a16="http://schemas.microsoft.com/office/drawing/2014/main" val="10003"/>
+                  </a:ext>
+                </a:extLst>
               </a:tr>
             </a:tbl>
           </a:graphicData>
@@ -4321,6 +4415,7 @@
           <a:lstStyle/>
           <a:p>
             <a:pPr algn="ctr"/>
+            <a:endParaRPr/>
           </a:p>
         </p:txBody>
       </p:sp>
@@ -4801,7 +4896,7 @@
 </file>
 
 <file path=ppt/slides/slide11.xml><?xml version="1.0" encoding="utf-8"?>
-<p:sld xmlns:a="http://schemas.openxmlformats.org/drawingml/2006/main" xmlns:p="http://schemas.openxmlformats.org/presentationml/2006/main" xmlns:r="http://schemas.openxmlformats.org/officeDocument/2006/relationships">
+<p:sld xmlns:a="http://schemas.openxmlformats.org/drawingml/2006/main" xmlns:r="http://schemas.openxmlformats.org/officeDocument/2006/relationships" xmlns:p="http://schemas.openxmlformats.org/presentationml/2006/main">
   <p:cSld>
     <p:bg>
       <p:bgPr>
@@ -4817,7 +4912,14 @@
         <p:cNvGrpSpPr/>
         <p:nvPr/>
       </p:nvGrpSpPr>
-      <p:grpSpPr/>
+      <p:grpSpPr>
+        <a:xfrm>
+          <a:off x="0" y="0"/>
+          <a:ext cx="0" cy="0"/>
+          <a:chOff x="0" y="0"/>
+          <a:chExt cx="0" cy="0"/>
+        </a:xfrm>
+      </p:grpSpPr>
       <p:sp>
         <p:nvSpPr>
           <p:cNvPr id="2" name="TextBox 1"/>
@@ -4894,6 +4996,7 @@
           <a:lstStyle/>
           <a:p>
             <a:pPr algn="ctr"/>
+            <a:endParaRPr/>
           </a:p>
         </p:txBody>
       </p:sp>
@@ -4952,9 +5055,27 @@
                 <a:tableStyleId>{5C22544A-7EE6-4342-B048-85BDC9FD1C3A}</a:tableStyleId>
               </a:tblPr>
               <a:tblGrid>
-                <a:gridCol w="1645920"/>
-                <a:gridCol w="1371600"/>
-                <a:gridCol w="1554480"/>
+                <a:gridCol w="1645920">
+                  <a:extLst>
+                    <a:ext uri="{9D8B030D-6E8A-4147-A177-3AD203B41FA5}">
+                      <a16:colId xmlns:a16="http://schemas.microsoft.com/office/drawing/2014/main" val="20000"/>
+                    </a:ext>
+                  </a:extLst>
+                </a:gridCol>
+                <a:gridCol w="1371600">
+                  <a:extLst>
+                    <a:ext uri="{9D8B030D-6E8A-4147-A177-3AD203B41FA5}">
+                      <a16:colId xmlns:a16="http://schemas.microsoft.com/office/drawing/2014/main" val="20001"/>
+                    </a:ext>
+                  </a:extLst>
+                </a:gridCol>
+                <a:gridCol w="1554480">
+                  <a:extLst>
+                    <a:ext uri="{9D8B030D-6E8A-4147-A177-3AD203B41FA5}">
+                      <a16:colId xmlns:a16="http://schemas.microsoft.com/office/drawing/2014/main" val="20002"/>
+                    </a:ext>
+                  </a:extLst>
+                </a:gridCol>
               </a:tblGrid>
               <a:tr h="396240">
                 <a:tc>
@@ -5029,6 +5150,11 @@
                     </a:solidFill>
                   </a:tcPr>
                 </a:tc>
+                <a:extLst>
+                  <a:ext uri="{0D108BD9-81ED-4DB2-BD59-A6C34878D82A}">
+                    <a16:rowId xmlns:a16="http://schemas.microsoft.com/office/drawing/2014/main" val="10000"/>
+                  </a:ext>
+                </a:extLst>
               </a:tr>
               <a:tr h="396240">
                 <a:tc>
@@ -5103,6 +5229,11 @@
                     </a:solidFill>
                   </a:tcPr>
                 </a:tc>
+                <a:extLst>
+                  <a:ext uri="{0D108BD9-81ED-4DB2-BD59-A6C34878D82A}">
+                    <a16:rowId xmlns:a16="http://schemas.microsoft.com/office/drawing/2014/main" val="10001"/>
+                  </a:ext>
+                </a:extLst>
               </a:tr>
               <a:tr h="396240">
                 <a:tc>
@@ -5177,6 +5308,11 @@
                     </a:solidFill>
                   </a:tcPr>
                 </a:tc>
+                <a:extLst>
+                  <a:ext uri="{0D108BD9-81ED-4DB2-BD59-A6C34878D82A}">
+                    <a16:rowId xmlns:a16="http://schemas.microsoft.com/office/drawing/2014/main" val="10002"/>
+                  </a:ext>
+                </a:extLst>
               </a:tr>
             </a:tbl>
           </a:graphicData>
@@ -5222,6 +5358,7 @@
           <a:lstStyle/>
           <a:p>
             <a:pPr algn="ctr"/>
+            <a:endParaRPr/>
           </a:p>
         </p:txBody>
       </p:sp>
@@ -5404,6 +5541,7 @@
           <a:lstStyle/>
           <a:p>
             <a:pPr algn="ctr"/>
+            <a:endParaRPr/>
           </a:p>
         </p:txBody>
       </p:sp>
@@ -5462,9 +5600,27 @@
                 <a:tableStyleId>{5C22544A-7EE6-4342-B048-85BDC9FD1C3A}</a:tableStyleId>
               </a:tblPr>
               <a:tblGrid>
-                <a:gridCol w="3200400"/>
-                <a:gridCol w="1371600"/>
-                <a:gridCol w="5760720"/>
+                <a:gridCol w="3200400">
+                  <a:extLst>
+                    <a:ext uri="{9D8B030D-6E8A-4147-A177-3AD203B41FA5}">
+                      <a16:colId xmlns:a16="http://schemas.microsoft.com/office/drawing/2014/main" val="20000"/>
+                    </a:ext>
+                  </a:extLst>
+                </a:gridCol>
+                <a:gridCol w="1371600">
+                  <a:extLst>
+                    <a:ext uri="{9D8B030D-6E8A-4147-A177-3AD203B41FA5}">
+                      <a16:colId xmlns:a16="http://schemas.microsoft.com/office/drawing/2014/main" val="20001"/>
+                    </a:ext>
+                  </a:extLst>
+                </a:gridCol>
+                <a:gridCol w="5760720">
+                  <a:extLst>
+                    <a:ext uri="{9D8B030D-6E8A-4147-A177-3AD203B41FA5}">
+                      <a16:colId xmlns:a16="http://schemas.microsoft.com/office/drawing/2014/main" val="20002"/>
+                    </a:ext>
+                  </a:extLst>
+                </a:gridCol>
               </a:tblGrid>
               <a:tr h="365760">
                 <a:tc>
@@ -5539,6 +5695,11 @@
                     </a:solidFill>
                   </a:tcPr>
                 </a:tc>
+                <a:extLst>
+                  <a:ext uri="{0D108BD9-81ED-4DB2-BD59-A6C34878D82A}">
+                    <a16:rowId xmlns:a16="http://schemas.microsoft.com/office/drawing/2014/main" val="10000"/>
+                  </a:ext>
+                </a:extLst>
               </a:tr>
               <a:tr h="365760">
                 <a:tc>
@@ -5613,6 +5774,11 @@
                     </a:solidFill>
                   </a:tcPr>
                 </a:tc>
+                <a:extLst>
+                  <a:ext uri="{0D108BD9-81ED-4DB2-BD59-A6C34878D82A}">
+                    <a16:rowId xmlns:a16="http://schemas.microsoft.com/office/drawing/2014/main" val="10001"/>
+                  </a:ext>
+                </a:extLst>
               </a:tr>
               <a:tr h="365760">
                 <a:tc>
@@ -5687,6 +5853,11 @@
                     </a:solidFill>
                   </a:tcPr>
                 </a:tc>
+                <a:extLst>
+                  <a:ext uri="{0D108BD9-81ED-4DB2-BD59-A6C34878D82A}">
+                    <a16:rowId xmlns:a16="http://schemas.microsoft.com/office/drawing/2014/main" val="10002"/>
+                  </a:ext>
+                </a:extLst>
               </a:tr>
               <a:tr h="365760">
                 <a:tc>
@@ -5761,6 +5932,11 @@
                     </a:solidFill>
                   </a:tcPr>
                 </a:tc>
+                <a:extLst>
+                  <a:ext uri="{0D108BD9-81ED-4DB2-BD59-A6C34878D82A}">
+                    <a16:rowId xmlns:a16="http://schemas.microsoft.com/office/drawing/2014/main" val="10003"/>
+                  </a:ext>
+                </a:extLst>
               </a:tr>
             </a:tbl>
           </a:graphicData>
@@ -5775,7 +5951,7 @@
 </file>
 
 <file path=ppt/slides/slide12.xml><?xml version="1.0" encoding="utf-8"?>
-<p:sld xmlns:a="http://schemas.openxmlformats.org/drawingml/2006/main" xmlns:p="http://schemas.openxmlformats.org/presentationml/2006/main" xmlns:r="http://schemas.openxmlformats.org/officeDocument/2006/relationships">
+<p:sld xmlns:a="http://schemas.openxmlformats.org/drawingml/2006/main" xmlns:r="http://schemas.openxmlformats.org/officeDocument/2006/relationships" xmlns:p="http://schemas.openxmlformats.org/presentationml/2006/main">
   <p:cSld>
     <p:bg>
       <p:bgPr>
@@ -5791,7 +5967,14 @@
         <p:cNvGrpSpPr/>
         <p:nvPr/>
       </p:nvGrpSpPr>
-      <p:grpSpPr/>
+      <p:grpSpPr>
+        <a:xfrm>
+          <a:off x="0" y="0"/>
+          <a:ext cx="0" cy="0"/>
+          <a:chOff x="0" y="0"/>
+          <a:chExt cx="0" cy="0"/>
+        </a:xfrm>
+      </p:grpSpPr>
       <p:sp>
         <p:nvSpPr>
           <p:cNvPr id="2" name="Rectangle 1"/>
@@ -5832,6 +6015,7 @@
           <a:lstStyle/>
           <a:p>
             <a:pPr algn="ctr"/>
+            <a:endParaRPr/>
           </a:p>
         </p:txBody>
       </p:sp>
@@ -5911,6 +6095,7 @@
           <a:lstStyle/>
           <a:p>
             <a:pPr algn="ctr"/>
+            <a:endParaRPr/>
           </a:p>
         </p:txBody>
       </p:sp>
@@ -5995,7 +6180,7 @@
 </file>
 
 <file path=ppt/slides/slide2.xml><?xml version="1.0" encoding="utf-8"?>
-<p:sld xmlns:a="http://schemas.openxmlformats.org/drawingml/2006/main" xmlns:p="http://schemas.openxmlformats.org/presentationml/2006/main" xmlns:r="http://schemas.openxmlformats.org/officeDocument/2006/relationships">
+<p:sld xmlns:a="http://schemas.openxmlformats.org/drawingml/2006/main" xmlns:r="http://schemas.openxmlformats.org/officeDocument/2006/relationships" xmlns:p="http://schemas.openxmlformats.org/presentationml/2006/main">
   <p:cSld>
     <p:bg>
       <p:bgPr>
@@ -6011,7 +6196,14 @@
         <p:cNvGrpSpPr/>
         <p:nvPr/>
       </p:nvGrpSpPr>
-      <p:grpSpPr/>
+      <p:grpSpPr>
+        <a:xfrm>
+          <a:off x="0" y="0"/>
+          <a:ext cx="0" cy="0"/>
+          <a:chOff x="0" y="0"/>
+          <a:chExt cx="0" cy="0"/>
+        </a:xfrm>
+      </p:grpSpPr>
       <p:sp>
         <p:nvSpPr>
           <p:cNvPr id="2" name="TextBox 1"/>
@@ -6088,6 +6280,7 @@
           <a:lstStyle/>
           <a:p>
             <a:pPr algn="ctr"/>
+            <a:endParaRPr/>
           </a:p>
         </p:txBody>
       </p:sp>
@@ -6254,6 +6447,7 @@
           <a:lstStyle/>
           <a:p>
             <a:pPr algn="ctr"/>
+            <a:endParaRPr/>
           </a:p>
         </p:txBody>
       </p:sp>
@@ -6420,6 +6614,7 @@
           <a:lstStyle/>
           <a:p>
             <a:pPr algn="ctr"/>
+            <a:endParaRPr/>
           </a:p>
         </p:txBody>
       </p:sp>
@@ -6539,7 +6734,7 @@
 </file>
 
 <file path=ppt/slides/slide3.xml><?xml version="1.0" encoding="utf-8"?>
-<p:sld xmlns:a="http://schemas.openxmlformats.org/drawingml/2006/main" xmlns:p="http://schemas.openxmlformats.org/presentationml/2006/main" xmlns:r="http://schemas.openxmlformats.org/officeDocument/2006/relationships">
+<p:sld xmlns:a="http://schemas.openxmlformats.org/drawingml/2006/main" xmlns:r="http://schemas.openxmlformats.org/officeDocument/2006/relationships" xmlns:p="http://schemas.openxmlformats.org/presentationml/2006/main">
   <p:cSld>
     <p:bg>
       <p:bgPr>
@@ -6555,7 +6750,14 @@
         <p:cNvGrpSpPr/>
         <p:nvPr/>
       </p:nvGrpSpPr>
-      <p:grpSpPr/>
+      <p:grpSpPr>
+        <a:xfrm>
+          <a:off x="0" y="0"/>
+          <a:ext cx="0" cy="0"/>
+          <a:chOff x="0" y="0"/>
+          <a:chExt cx="0" cy="0"/>
+        </a:xfrm>
+      </p:grpSpPr>
       <p:sp>
         <p:nvSpPr>
           <p:cNvPr id="2" name="TextBox 1"/>
@@ -6632,6 +6834,7 @@
           <a:lstStyle/>
           <a:p>
             <a:pPr algn="ctr"/>
+            <a:endParaRPr/>
           </a:p>
         </p:txBody>
       </p:sp>
@@ -6830,6 +7033,7 @@
           <a:lstStyle/>
           <a:p>
             <a:pPr algn="ctr"/>
+            <a:endParaRPr/>
           </a:p>
         </p:txBody>
       </p:sp>
@@ -7012,6 +7216,7 @@
           <a:lstStyle/>
           <a:p>
             <a:pPr algn="ctr"/>
+            <a:endParaRPr/>
           </a:p>
         </p:txBody>
       </p:sp>
@@ -7194,6 +7399,7 @@
           <a:lstStyle/>
           <a:p>
             <a:pPr algn="ctr"/>
+            <a:endParaRPr/>
           </a:p>
         </p:txBody>
       </p:sp>
@@ -7252,9 +7458,27 @@
                 <a:tableStyleId>{5C22544A-7EE6-4342-B048-85BDC9FD1C3A}</a:tableStyleId>
               </a:tblPr>
               <a:tblGrid>
-                <a:gridCol w="2743200"/>
-                <a:gridCol w="4572000"/>
-                <a:gridCol w="2743200"/>
+                <a:gridCol w="2743200">
+                  <a:extLst>
+                    <a:ext uri="{9D8B030D-6E8A-4147-A177-3AD203B41FA5}">
+                      <a16:colId xmlns:a16="http://schemas.microsoft.com/office/drawing/2014/main" val="20000"/>
+                    </a:ext>
+                  </a:extLst>
+                </a:gridCol>
+                <a:gridCol w="4572000">
+                  <a:extLst>
+                    <a:ext uri="{9D8B030D-6E8A-4147-A177-3AD203B41FA5}">
+                      <a16:colId xmlns:a16="http://schemas.microsoft.com/office/drawing/2014/main" val="20001"/>
+                    </a:ext>
+                  </a:extLst>
+                </a:gridCol>
+                <a:gridCol w="2743200">
+                  <a:extLst>
+                    <a:ext uri="{9D8B030D-6E8A-4147-A177-3AD203B41FA5}">
+                      <a16:colId xmlns:a16="http://schemas.microsoft.com/office/drawing/2014/main" val="20002"/>
+                    </a:ext>
+                  </a:extLst>
+                </a:gridCol>
               </a:tblGrid>
               <a:tr h="396240">
                 <a:tc>
@@ -7329,6 +7553,11 @@
                     </a:solidFill>
                   </a:tcPr>
                 </a:tc>
+                <a:extLst>
+                  <a:ext uri="{0D108BD9-81ED-4DB2-BD59-A6C34878D82A}">
+                    <a16:rowId xmlns:a16="http://schemas.microsoft.com/office/drawing/2014/main" val="10000"/>
+                  </a:ext>
+                </a:extLst>
               </a:tr>
               <a:tr h="396240">
                 <a:tc>
@@ -7403,6 +7632,11 @@
                     </a:solidFill>
                   </a:tcPr>
                 </a:tc>
+                <a:extLst>
+                  <a:ext uri="{0D108BD9-81ED-4DB2-BD59-A6C34878D82A}">
+                    <a16:rowId xmlns:a16="http://schemas.microsoft.com/office/drawing/2014/main" val="10001"/>
+                  </a:ext>
+                </a:extLst>
               </a:tr>
               <a:tr h="396240">
                 <a:tc>
@@ -7477,6 +7711,11 @@
                     </a:solidFill>
                   </a:tcPr>
                 </a:tc>
+                <a:extLst>
+                  <a:ext uri="{0D108BD9-81ED-4DB2-BD59-A6C34878D82A}">
+                    <a16:rowId xmlns:a16="http://schemas.microsoft.com/office/drawing/2014/main" val="10002"/>
+                  </a:ext>
+                </a:extLst>
               </a:tr>
             </a:tbl>
           </a:graphicData>
@@ -7491,7 +7730,7 @@
 </file>
 
 <file path=ppt/slides/slide4.xml><?xml version="1.0" encoding="utf-8"?>
-<p:sld xmlns:a="http://schemas.openxmlformats.org/drawingml/2006/main" xmlns:p="http://schemas.openxmlformats.org/presentationml/2006/main" xmlns:r="http://schemas.openxmlformats.org/officeDocument/2006/relationships">
+<p:sld xmlns:a="http://schemas.openxmlformats.org/drawingml/2006/main" xmlns:r="http://schemas.openxmlformats.org/officeDocument/2006/relationships" xmlns:p="http://schemas.openxmlformats.org/presentationml/2006/main">
   <p:cSld>
     <p:bg>
       <p:bgPr>
@@ -7507,7 +7746,14 @@
         <p:cNvGrpSpPr/>
         <p:nvPr/>
       </p:nvGrpSpPr>
-      <p:grpSpPr/>
+      <p:grpSpPr>
+        <a:xfrm>
+          <a:off x="0" y="0"/>
+          <a:ext cx="0" cy="0"/>
+          <a:chOff x="0" y="0"/>
+          <a:chExt cx="0" cy="0"/>
+        </a:xfrm>
+      </p:grpSpPr>
       <p:sp>
         <p:nvSpPr>
           <p:cNvPr id="2" name="TextBox 1"/>
@@ -7563,10 +7809,34 @@
                 <a:tableStyleId>{5C22544A-7EE6-4342-B048-85BDC9FD1C3A}</a:tableStyleId>
               </a:tblPr>
               <a:tblGrid>
-                <a:gridCol w="1828800"/>
-                <a:gridCol w="2743200"/>
-                <a:gridCol w="3840480"/>
-                <a:gridCol w="2286000"/>
+                <a:gridCol w="1828800">
+                  <a:extLst>
+                    <a:ext uri="{9D8B030D-6E8A-4147-A177-3AD203B41FA5}">
+                      <a16:colId xmlns:a16="http://schemas.microsoft.com/office/drawing/2014/main" val="20000"/>
+                    </a:ext>
+                  </a:extLst>
+                </a:gridCol>
+                <a:gridCol w="2743200">
+                  <a:extLst>
+                    <a:ext uri="{9D8B030D-6E8A-4147-A177-3AD203B41FA5}">
+                      <a16:colId xmlns:a16="http://schemas.microsoft.com/office/drawing/2014/main" val="20001"/>
+                    </a:ext>
+                  </a:extLst>
+                </a:gridCol>
+                <a:gridCol w="3840480">
+                  <a:extLst>
+                    <a:ext uri="{9D8B030D-6E8A-4147-A177-3AD203B41FA5}">
+                      <a16:colId xmlns:a16="http://schemas.microsoft.com/office/drawing/2014/main" val="20002"/>
+                    </a:ext>
+                  </a:extLst>
+                </a:gridCol>
+                <a:gridCol w="2286000">
+                  <a:extLst>
+                    <a:ext uri="{9D8B030D-6E8A-4147-A177-3AD203B41FA5}">
+                      <a16:colId xmlns:a16="http://schemas.microsoft.com/office/drawing/2014/main" val="20003"/>
+                    </a:ext>
+                  </a:extLst>
+                </a:gridCol>
               </a:tblGrid>
               <a:tr h="558800">
                 <a:tc>
@@ -7665,6 +7935,11 @@
                     </a:solidFill>
                   </a:tcPr>
                 </a:tc>
+                <a:extLst>
+                  <a:ext uri="{0D108BD9-81ED-4DB2-BD59-A6C34878D82A}">
+                    <a16:rowId xmlns:a16="http://schemas.microsoft.com/office/drawing/2014/main" val="10000"/>
+                  </a:ext>
+                </a:extLst>
               </a:tr>
               <a:tr h="558800">
                 <a:tc>
@@ -7763,6 +8038,11 @@
                     </a:solidFill>
                   </a:tcPr>
                 </a:tc>
+                <a:extLst>
+                  <a:ext uri="{0D108BD9-81ED-4DB2-BD59-A6C34878D82A}">
+                    <a16:rowId xmlns:a16="http://schemas.microsoft.com/office/drawing/2014/main" val="10001"/>
+                  </a:ext>
+                </a:extLst>
               </a:tr>
               <a:tr h="558800">
                 <a:tc>
@@ -7861,6 +8141,11 @@
                     </a:solidFill>
                   </a:tcPr>
                 </a:tc>
+                <a:extLst>
+                  <a:ext uri="{0D108BD9-81ED-4DB2-BD59-A6C34878D82A}">
+                    <a16:rowId xmlns:a16="http://schemas.microsoft.com/office/drawing/2014/main" val="10002"/>
+                  </a:ext>
+                </a:extLst>
               </a:tr>
               <a:tr h="558800">
                 <a:tc>
@@ -7959,6 +8244,11 @@
                     </a:solidFill>
                   </a:tcPr>
                 </a:tc>
+                <a:extLst>
+                  <a:ext uri="{0D108BD9-81ED-4DB2-BD59-A6C34878D82A}">
+                    <a16:rowId xmlns:a16="http://schemas.microsoft.com/office/drawing/2014/main" val="10003"/>
+                  </a:ext>
+                </a:extLst>
               </a:tr>
               <a:tr h="558800">
                 <a:tc>
@@ -8057,6 +8347,11 @@
                     </a:solidFill>
                   </a:tcPr>
                 </a:tc>
+                <a:extLst>
+                  <a:ext uri="{0D108BD9-81ED-4DB2-BD59-A6C34878D82A}">
+                    <a16:rowId xmlns:a16="http://schemas.microsoft.com/office/drawing/2014/main" val="10004"/>
+                  </a:ext>
+                </a:extLst>
               </a:tr>
               <a:tr h="558800">
                 <a:tc>
@@ -8155,6 +8450,11 @@
                     </a:solidFill>
                   </a:tcPr>
                 </a:tc>
+                <a:extLst>
+                  <a:ext uri="{0D108BD9-81ED-4DB2-BD59-A6C34878D82A}">
+                    <a16:rowId xmlns:a16="http://schemas.microsoft.com/office/drawing/2014/main" val="10005"/>
+                  </a:ext>
+                </a:extLst>
               </a:tr>
               <a:tr h="558800">
                 <a:tc>
@@ -8253,6 +8553,11 @@
                     </a:solidFill>
                   </a:tcPr>
                 </a:tc>
+                <a:extLst>
+                  <a:ext uri="{0D108BD9-81ED-4DB2-BD59-A6C34878D82A}">
+                    <a16:rowId xmlns:a16="http://schemas.microsoft.com/office/drawing/2014/main" val="10006"/>
+                  </a:ext>
+                </a:extLst>
               </a:tr>
               <a:tr h="558800">
                 <a:tc>
@@ -8351,6 +8656,11 @@
                     </a:solidFill>
                   </a:tcPr>
                 </a:tc>
+                <a:extLst>
+                  <a:ext uri="{0D108BD9-81ED-4DB2-BD59-A6C34878D82A}">
+                    <a16:rowId xmlns:a16="http://schemas.microsoft.com/office/drawing/2014/main" val="10007"/>
+                  </a:ext>
+                </a:extLst>
               </a:tr>
               <a:tr h="558800">
                 <a:tc>
@@ -8449,6 +8759,11 @@
                     </a:solidFill>
                   </a:tcPr>
                 </a:tc>
+                <a:extLst>
+                  <a:ext uri="{0D108BD9-81ED-4DB2-BD59-A6C34878D82A}">
+                    <a16:rowId xmlns:a16="http://schemas.microsoft.com/office/drawing/2014/main" val="10008"/>
+                  </a:ext>
+                </a:extLst>
               </a:tr>
             </a:tbl>
           </a:graphicData>
@@ -8463,7 +8778,7 @@
 </file>
 
 <file path=ppt/slides/slide5.xml><?xml version="1.0" encoding="utf-8"?>
-<p:sld xmlns:a="http://schemas.openxmlformats.org/drawingml/2006/main" xmlns:p="http://schemas.openxmlformats.org/presentationml/2006/main" xmlns:r="http://schemas.openxmlformats.org/officeDocument/2006/relationships">
+<p:sld xmlns:a="http://schemas.openxmlformats.org/drawingml/2006/main" xmlns:r="http://schemas.openxmlformats.org/officeDocument/2006/relationships" xmlns:p="http://schemas.openxmlformats.org/presentationml/2006/main">
   <p:cSld>
     <p:bg>
       <p:bgPr>
@@ -8479,7 +8794,14 @@
         <p:cNvGrpSpPr/>
         <p:nvPr/>
       </p:nvGrpSpPr>
-      <p:grpSpPr/>
+      <p:grpSpPr>
+        <a:xfrm>
+          <a:off x="0" y="0"/>
+          <a:ext cx="0" cy="0"/>
+          <a:chOff x="0" y="0"/>
+          <a:chExt cx="0" cy="0"/>
+        </a:xfrm>
+      </p:grpSpPr>
       <p:sp>
         <p:nvSpPr>
           <p:cNvPr id="2" name="TextBox 1"/>
@@ -8556,6 +8878,7 @@
           <a:lstStyle/>
           <a:p>
             <a:pPr algn="ctr"/>
+            <a:endParaRPr/>
           </a:p>
         </p:txBody>
       </p:sp>
@@ -8671,6 +8994,7 @@
           <a:lstStyle/>
           <a:p>
             <a:pPr algn="ctr"/>
+            <a:endParaRPr/>
           </a:p>
         </p:txBody>
       </p:sp>
@@ -8786,6 +9110,7 @@
           <a:lstStyle/>
           <a:p>
             <a:pPr algn="ctr"/>
+            <a:endParaRPr/>
           </a:p>
         </p:txBody>
       </p:sp>
@@ -8901,6 +9226,7 @@
           <a:lstStyle/>
           <a:p>
             <a:pPr algn="ctr"/>
+            <a:endParaRPr/>
           </a:p>
         </p:txBody>
       </p:sp>
@@ -8944,6 +9270,7 @@
           <a:lstStyle/>
           <a:p>
             <a:pPr algn="ctr"/>
+            <a:endParaRPr/>
           </a:p>
         </p:txBody>
       </p:sp>
@@ -9094,6 +9421,7 @@
           <a:lstStyle/>
           <a:p>
             <a:pPr algn="ctr"/>
+            <a:endParaRPr/>
           </a:p>
         </p:txBody>
       </p:sp>
@@ -9137,6 +9465,7 @@
           <a:lstStyle/>
           <a:p>
             <a:pPr algn="ctr"/>
+            <a:endParaRPr/>
           </a:p>
         </p:txBody>
       </p:sp>
@@ -9252,6 +9581,7 @@
           <a:lstStyle/>
           <a:p>
             <a:pPr algn="ctr"/>
+            <a:endParaRPr/>
           </a:p>
         </p:txBody>
       </p:sp>
@@ -9336,7 +9666,7 @@
 </file>
 
 <file path=ppt/slides/slide6.xml><?xml version="1.0" encoding="utf-8"?>
-<p:sld xmlns:a="http://schemas.openxmlformats.org/drawingml/2006/main" xmlns:p="http://schemas.openxmlformats.org/presentationml/2006/main" xmlns:r="http://schemas.openxmlformats.org/officeDocument/2006/relationships">
+<p:sld xmlns:a="http://schemas.openxmlformats.org/drawingml/2006/main" xmlns:r="http://schemas.openxmlformats.org/officeDocument/2006/relationships" xmlns:p="http://schemas.openxmlformats.org/presentationml/2006/main">
   <p:cSld>
     <p:bg>
       <p:bgPr>
@@ -9352,7 +9682,14 @@
         <p:cNvGrpSpPr/>
         <p:nvPr/>
       </p:nvGrpSpPr>
-      <p:grpSpPr/>
+      <p:grpSpPr>
+        <a:xfrm>
+          <a:off x="0" y="0"/>
+          <a:ext cx="0" cy="0"/>
+          <a:chOff x="0" y="0"/>
+          <a:chExt cx="0" cy="0"/>
+        </a:xfrm>
+      </p:grpSpPr>
       <p:sp>
         <p:nvSpPr>
           <p:cNvPr id="2" name="TextBox 1"/>
@@ -9429,6 +9766,7 @@
           <a:lstStyle/>
           <a:p>
             <a:pPr algn="ctr"/>
+            <a:endParaRPr/>
           </a:p>
         </p:txBody>
       </p:sp>
@@ -9595,6 +9933,7 @@
           <a:lstStyle/>
           <a:p>
             <a:pPr algn="ctr"/>
+            <a:endParaRPr/>
           </a:p>
         </p:txBody>
       </p:sp>
@@ -9643,7 +9982,7 @@
         <p:spPr>
           <a:xfrm>
             <a:off x="6766560" y="1828800"/>
-            <a:ext cx="4572000" cy="1645920"/>
+            <a:ext cx="4572000" cy="1208023"/>
           </a:xfrm>
           <a:prstGeom prst="rect">
             <a:avLst/>
@@ -9668,7 +10007,36 @@
               </a:defRPr>
             </a:pPr>
             <a:r>
-              <a:t>输入: 图像 + 目标类别提示(如'microwave')</a:t>
+              <a:rPr dirty="0" err="1"/>
+              <a:t>输入</a:t>
+            </a:r>
+            <a:r>
+              <a:rPr dirty="0"/>
+              <a:t>: </a:t>
+            </a:r>
+            <a:r>
+              <a:rPr dirty="0" err="1"/>
+              <a:t>图像</a:t>
+            </a:r>
+            <a:r>
+              <a:rPr dirty="0"/>
+              <a:t> + </a:t>
+            </a:r>
+            <a:r>
+              <a:rPr dirty="0" err="1"/>
+              <a:t>目标类别提示</a:t>
+            </a:r>
+            <a:r>
+              <a:rPr dirty="0"/>
+              <a:t>(</a:t>
+            </a:r>
+            <a:r>
+              <a:rPr dirty="0" err="1"/>
+              <a:t>如'microwave</a:t>
+            </a:r>
+            <a:r>
+              <a:rPr dirty="0"/>
+              <a:t>')</a:t>
             </a:r>
           </a:p>
           <a:p>
@@ -9684,8 +10052,18 @@
               </a:defRPr>
             </a:pPr>
             <a:r>
-              <a:t>输出: mask + bounding box + 中心点坐标</a:t>
-            </a:r>
+              <a:rPr dirty="0" err="1"/>
+              <a:t>输出</a:t>
+            </a:r>
+            <a:r>
+              <a:rPr dirty="0"/>
+              <a:t>: mask + bounding box + </a:t>
+            </a:r>
+            <a:r>
+              <a:rPr dirty="0" err="1"/>
+              <a:t>中心点坐标</a:t>
+            </a:r>
+            <a:endParaRPr dirty="0"/>
           </a:p>
           <a:p>
             <a:pPr>
@@ -9700,8 +10078,18 @@
               </a:defRPr>
             </a:pPr>
             <a:r>
-              <a:t>作用: 提供'目标在哪'的空间定位信息</a:t>
-            </a:r>
+              <a:rPr dirty="0" err="1"/>
+              <a:t>作用</a:t>
+            </a:r>
+            <a:r>
+              <a:rPr dirty="0"/>
+              <a:t>: </a:t>
+            </a:r>
+            <a:r>
+              <a:rPr dirty="0" err="1"/>
+              <a:t>提供'目标在哪'的空间定位信息</a:t>
+            </a:r>
+            <a:endParaRPr dirty="0"/>
           </a:p>
           <a:p>
             <a:pPr>
@@ -9716,8 +10104,24 @@
               </a:defRPr>
             </a:pPr>
             <a:r>
-              <a:t>轻量版~40MB, 适合实时推理</a:t>
-            </a:r>
+              <a:rPr dirty="0"/>
+              <a:t>轻量版</a:t>
+            </a:r>
+            <a:r>
+              <a:t>~40M</a:t>
+            </a:r>
+            <a:r>
+              <a:rPr lang="en-US" altLang="zh-CN"/>
+              <a:t>B</a:t>
+            </a:r>
+            <a:r>
+              <a:t>, </a:t>
+            </a:r>
+            <a:r>
+              <a:rPr dirty="0" err="1"/>
+              <a:t>适合实时推理</a:t>
+            </a:r>
+            <a:endParaRPr dirty="0"/>
           </a:p>
         </p:txBody>
       </p:sp>
@@ -9761,6 +10165,7 @@
           <a:lstStyle/>
           <a:p>
             <a:pPr algn="ctr"/>
+            <a:endParaRPr/>
           </a:p>
         </p:txBody>
       </p:sp>
@@ -9900,7 +10305,7 @@
 </file>
 
 <file path=ppt/slides/slide7.xml><?xml version="1.0" encoding="utf-8"?>
-<p:sld xmlns:a="http://schemas.openxmlformats.org/drawingml/2006/main" xmlns:p="http://schemas.openxmlformats.org/presentationml/2006/main" xmlns:r="http://schemas.openxmlformats.org/officeDocument/2006/relationships">
+<p:sld xmlns:a="http://schemas.openxmlformats.org/drawingml/2006/main" xmlns:r="http://schemas.openxmlformats.org/officeDocument/2006/relationships" xmlns:p="http://schemas.openxmlformats.org/presentationml/2006/main">
   <p:cSld>
     <p:bg>
       <p:bgPr>
@@ -9916,7 +10321,14 @@
         <p:cNvGrpSpPr/>
         <p:nvPr/>
       </p:nvGrpSpPr>
-      <p:grpSpPr/>
+      <p:grpSpPr>
+        <a:xfrm>
+          <a:off x="0" y="0"/>
+          <a:ext cx="0" cy="0"/>
+          <a:chOff x="0" y="0"/>
+          <a:chExt cx="0" cy="0"/>
+        </a:xfrm>
+      </p:grpSpPr>
       <p:sp>
         <p:nvSpPr>
           <p:cNvPr id="2" name="TextBox 1"/>
@@ -9993,6 +10405,7 @@
           <a:lstStyle/>
           <a:p>
             <a:pPr algn="ctr"/>
+            <a:endParaRPr/>
           </a:p>
         </p:txBody>
       </p:sp>
@@ -10042,7 +10455,7 @@
         </p:nvGraphicFramePr>
         <p:xfrm>
           <a:off x="1097280" y="1920240"/>
-          <a:ext cx="4389120" cy="1828800"/>
+          <a:ext cx="4389120" cy="1889760"/>
         </p:xfrm>
         <a:graphic>
           <a:graphicData uri="http://schemas.openxmlformats.org/drawingml/2006/table">
@@ -10051,8 +10464,20 @@
                 <a:tableStyleId>{5C22544A-7EE6-4342-B048-85BDC9FD1C3A}</a:tableStyleId>
               </a:tblPr>
               <a:tblGrid>
-                <a:gridCol w="1828800"/>
-                <a:gridCol w="2560320"/>
+                <a:gridCol w="1828800">
+                  <a:extLst>
+                    <a:ext uri="{9D8B030D-6E8A-4147-A177-3AD203B41FA5}">
+                      <a16:colId xmlns:a16="http://schemas.microsoft.com/office/drawing/2014/main" val="20000"/>
+                    </a:ext>
+                  </a:extLst>
+                </a:gridCol>
+                <a:gridCol w="2560320">
+                  <a:extLst>
+                    <a:ext uri="{9D8B030D-6E8A-4147-A177-3AD203B41FA5}">
+                      <a16:colId xmlns:a16="http://schemas.microsoft.com/office/drawing/2014/main" val="20001"/>
+                    </a:ext>
+                  </a:extLst>
+                </a:gridCol>
               </a:tblGrid>
               <a:tr h="304800">
                 <a:tc>
@@ -10103,6 +10528,11 @@
                     </a:solidFill>
                   </a:tcPr>
                 </a:tc>
+                <a:extLst>
+                  <a:ext uri="{0D108BD9-81ED-4DB2-BD59-A6C34878D82A}">
+                    <a16:rowId xmlns:a16="http://schemas.microsoft.com/office/drawing/2014/main" val="10000"/>
+                  </a:ext>
+                </a:extLst>
               </a:tr>
               <a:tr h="304800">
                 <a:tc>
@@ -10153,6 +10583,11 @@
                     </a:solidFill>
                   </a:tcPr>
                 </a:tc>
+                <a:extLst>
+                  <a:ext uri="{0D108BD9-81ED-4DB2-BD59-A6C34878D82A}">
+                    <a16:rowId xmlns:a16="http://schemas.microsoft.com/office/drawing/2014/main" val="10001"/>
+                  </a:ext>
+                </a:extLst>
               </a:tr>
               <a:tr h="304800">
                 <a:tc>
@@ -10203,6 +10638,11 @@
                     </a:solidFill>
                   </a:tcPr>
                 </a:tc>
+                <a:extLst>
+                  <a:ext uri="{0D108BD9-81ED-4DB2-BD59-A6C34878D82A}">
+                    <a16:rowId xmlns:a16="http://schemas.microsoft.com/office/drawing/2014/main" val="10002"/>
+                  </a:ext>
+                </a:extLst>
               </a:tr>
               <a:tr h="304800">
                 <a:tc>
@@ -10253,6 +10693,11 @@
                     </a:solidFill>
                   </a:tcPr>
                 </a:tc>
+                <a:extLst>
+                  <a:ext uri="{0D108BD9-81ED-4DB2-BD59-A6C34878D82A}">
+                    <a16:rowId xmlns:a16="http://schemas.microsoft.com/office/drawing/2014/main" val="10003"/>
+                  </a:ext>
+                </a:extLst>
               </a:tr>
               <a:tr h="304800">
                 <a:tc>
@@ -10303,13 +10748,20 @@
                     </a:solidFill>
                   </a:tcPr>
                 </a:tc>
+                <a:extLst>
+                  <a:ext uri="{0D108BD9-81ED-4DB2-BD59-A6C34878D82A}">
+                    <a16:rowId xmlns:a16="http://schemas.microsoft.com/office/drawing/2014/main" val="10004"/>
+                  </a:ext>
+                </a:extLst>
               </a:tr>
               <a:tr h="304800">
                 <a:tc>
                   <a:txBody>
                     <a:bodyPr/>
                     <a:lstStyle/>
-                    <a:p/>
+                    <a:p>
+                      <a:endParaRPr/>
+                    </a:p>
                   </a:txBody>
                   <a:tcPr/>
                 </a:tc>
@@ -10317,10 +10769,17 @@
                   <a:txBody>
                     <a:bodyPr/>
                     <a:lstStyle/>
-                    <a:p/>
+                    <a:p>
+                      <a:endParaRPr/>
+                    </a:p>
                   </a:txBody>
                   <a:tcPr/>
                 </a:tc>
+                <a:extLst>
+                  <a:ext uri="{0D108BD9-81ED-4DB2-BD59-A6C34878D82A}">
+                    <a16:rowId xmlns:a16="http://schemas.microsoft.com/office/drawing/2014/main" val="10005"/>
+                  </a:ext>
+                </a:extLst>
               </a:tr>
             </a:tbl>
           </a:graphicData>
@@ -10366,6 +10825,7 @@
           <a:lstStyle/>
           <a:p>
             <a:pPr algn="ctr"/>
+            <a:endParaRPr/>
           </a:p>
         </p:txBody>
       </p:sp>
@@ -10415,7 +10875,7 @@
         </p:nvGraphicFramePr>
         <p:xfrm>
           <a:off x="6766560" y="1920240"/>
-          <a:ext cx="4389120" cy="1828800"/>
+          <a:ext cx="4389120" cy="1889760"/>
         </p:xfrm>
         <a:graphic>
           <a:graphicData uri="http://schemas.openxmlformats.org/drawingml/2006/table">
@@ -10424,8 +10884,20 @@
                 <a:tableStyleId>{5C22544A-7EE6-4342-B048-85BDC9FD1C3A}</a:tableStyleId>
               </a:tblPr>
               <a:tblGrid>
-                <a:gridCol w="1828800"/>
-                <a:gridCol w="2560320"/>
+                <a:gridCol w="1828800">
+                  <a:extLst>
+                    <a:ext uri="{9D8B030D-6E8A-4147-A177-3AD203B41FA5}">
+                      <a16:colId xmlns:a16="http://schemas.microsoft.com/office/drawing/2014/main" val="20000"/>
+                    </a:ext>
+                  </a:extLst>
+                </a:gridCol>
+                <a:gridCol w="2560320">
+                  <a:extLst>
+                    <a:ext uri="{9D8B030D-6E8A-4147-A177-3AD203B41FA5}">
+                      <a16:colId xmlns:a16="http://schemas.microsoft.com/office/drawing/2014/main" val="20001"/>
+                    </a:ext>
+                  </a:extLst>
+                </a:gridCol>
               </a:tblGrid>
               <a:tr h="304800">
                 <a:tc>
@@ -10476,6 +10948,11 @@
                     </a:solidFill>
                   </a:tcPr>
                 </a:tc>
+                <a:extLst>
+                  <a:ext uri="{0D108BD9-81ED-4DB2-BD59-A6C34878D82A}">
+                    <a16:rowId xmlns:a16="http://schemas.microsoft.com/office/drawing/2014/main" val="10000"/>
+                  </a:ext>
+                </a:extLst>
               </a:tr>
               <a:tr h="304800">
                 <a:tc>
@@ -10526,6 +11003,11 @@
                     </a:solidFill>
                   </a:tcPr>
                 </a:tc>
+                <a:extLst>
+                  <a:ext uri="{0D108BD9-81ED-4DB2-BD59-A6C34878D82A}">
+                    <a16:rowId xmlns:a16="http://schemas.microsoft.com/office/drawing/2014/main" val="10001"/>
+                  </a:ext>
+                </a:extLst>
               </a:tr>
               <a:tr h="304800">
                 <a:tc>
@@ -10576,6 +11058,11 @@
                     </a:solidFill>
                   </a:tcPr>
                 </a:tc>
+                <a:extLst>
+                  <a:ext uri="{0D108BD9-81ED-4DB2-BD59-A6C34878D82A}">
+                    <a16:rowId xmlns:a16="http://schemas.microsoft.com/office/drawing/2014/main" val="10002"/>
+                  </a:ext>
+                </a:extLst>
               </a:tr>
               <a:tr h="304800">
                 <a:tc>
@@ -10626,6 +11113,11 @@
                     </a:solidFill>
                   </a:tcPr>
                 </a:tc>
+                <a:extLst>
+                  <a:ext uri="{0D108BD9-81ED-4DB2-BD59-A6C34878D82A}">
+                    <a16:rowId xmlns:a16="http://schemas.microsoft.com/office/drawing/2014/main" val="10003"/>
+                  </a:ext>
+                </a:extLst>
               </a:tr>
               <a:tr h="304800">
                 <a:tc>
@@ -10676,13 +11168,20 @@
                     </a:solidFill>
                   </a:tcPr>
                 </a:tc>
+                <a:extLst>
+                  <a:ext uri="{0D108BD9-81ED-4DB2-BD59-A6C34878D82A}">
+                    <a16:rowId xmlns:a16="http://schemas.microsoft.com/office/drawing/2014/main" val="10004"/>
+                  </a:ext>
+                </a:extLst>
               </a:tr>
               <a:tr h="304800">
                 <a:tc>
                   <a:txBody>
                     <a:bodyPr/>
                     <a:lstStyle/>
-                    <a:p/>
+                    <a:p>
+                      <a:endParaRPr/>
+                    </a:p>
                   </a:txBody>
                   <a:tcPr/>
                 </a:tc>
@@ -10690,10 +11189,17 @@
                   <a:txBody>
                     <a:bodyPr/>
                     <a:lstStyle/>
-                    <a:p/>
+                    <a:p>
+                      <a:endParaRPr/>
+                    </a:p>
                   </a:txBody>
                   <a:tcPr/>
                 </a:tc>
+                <a:extLst>
+                  <a:ext uri="{0D108BD9-81ED-4DB2-BD59-A6C34878D82A}">
+                    <a16:rowId xmlns:a16="http://schemas.microsoft.com/office/drawing/2014/main" val="10005"/>
+                  </a:ext>
+                </a:extLst>
               </a:tr>
             </a:tbl>
           </a:graphicData>
@@ -10739,6 +11245,7 @@
           <a:lstStyle/>
           <a:p>
             <a:pPr algn="ctr"/>
+            <a:endParaRPr/>
           </a:p>
         </p:txBody>
       </p:sp>
@@ -11003,7 +11510,7 @@
 </file>
 
 <file path=ppt/slides/slide8.xml><?xml version="1.0" encoding="utf-8"?>
-<p:sld xmlns:a="http://schemas.openxmlformats.org/drawingml/2006/main" xmlns:p="http://schemas.openxmlformats.org/presentationml/2006/main" xmlns:r="http://schemas.openxmlformats.org/officeDocument/2006/relationships">
+<p:sld xmlns:a="http://schemas.openxmlformats.org/drawingml/2006/main" xmlns:r="http://schemas.openxmlformats.org/officeDocument/2006/relationships" xmlns:p="http://schemas.openxmlformats.org/presentationml/2006/main">
   <p:cSld>
     <p:bg>
       <p:bgPr>
@@ -11019,7 +11526,14 @@
         <p:cNvGrpSpPr/>
         <p:nvPr/>
       </p:nvGrpSpPr>
-      <p:grpSpPr/>
+      <p:grpSpPr>
+        <a:xfrm>
+          <a:off x="0" y="0"/>
+          <a:ext cx="0" cy="0"/>
+          <a:chOff x="0" y="0"/>
+          <a:chExt cx="0" cy="0"/>
+        </a:xfrm>
+      </p:grpSpPr>
       <p:sp>
         <p:nvSpPr>
           <p:cNvPr id="2" name="TextBox 1"/>
@@ -11096,6 +11610,7 @@
           <a:lstStyle/>
           <a:p>
             <a:pPr algn="ctr"/>
+            <a:endParaRPr/>
           </a:p>
         </p:txBody>
       </p:sp>
@@ -11278,6 +11793,7 @@
           <a:lstStyle/>
           <a:p>
             <a:pPr algn="ctr"/>
+            <a:endParaRPr/>
           </a:p>
         </p:txBody>
       </p:sp>
@@ -11460,6 +11976,7 @@
           <a:lstStyle/>
           <a:p>
             <a:pPr algn="ctr"/>
+            <a:endParaRPr/>
           </a:p>
         </p:txBody>
       </p:sp>
@@ -11518,12 +12035,48 @@
                 <a:tableStyleId>{5C22544A-7EE6-4342-B048-85BDC9FD1C3A}</a:tableStyleId>
               </a:tblPr>
               <a:tblGrid>
-                <a:gridCol w="1645920"/>
-                <a:gridCol w="1645920"/>
-                <a:gridCol w="1645920"/>
-                <a:gridCol w="1828800"/>
-                <a:gridCol w="1828800"/>
-                <a:gridCol w="1737360"/>
+                <a:gridCol w="1645920">
+                  <a:extLst>
+                    <a:ext uri="{9D8B030D-6E8A-4147-A177-3AD203B41FA5}">
+                      <a16:colId xmlns:a16="http://schemas.microsoft.com/office/drawing/2014/main" val="20000"/>
+                    </a:ext>
+                  </a:extLst>
+                </a:gridCol>
+                <a:gridCol w="1645920">
+                  <a:extLst>
+                    <a:ext uri="{9D8B030D-6E8A-4147-A177-3AD203B41FA5}">
+                      <a16:colId xmlns:a16="http://schemas.microsoft.com/office/drawing/2014/main" val="20001"/>
+                    </a:ext>
+                  </a:extLst>
+                </a:gridCol>
+                <a:gridCol w="1645920">
+                  <a:extLst>
+                    <a:ext uri="{9D8B030D-6E8A-4147-A177-3AD203B41FA5}">
+                      <a16:colId xmlns:a16="http://schemas.microsoft.com/office/drawing/2014/main" val="20002"/>
+                    </a:ext>
+                  </a:extLst>
+                </a:gridCol>
+                <a:gridCol w="1828800">
+                  <a:extLst>
+                    <a:ext uri="{9D8B030D-6E8A-4147-A177-3AD203B41FA5}">
+                      <a16:colId xmlns:a16="http://schemas.microsoft.com/office/drawing/2014/main" val="20003"/>
+                    </a:ext>
+                  </a:extLst>
+                </a:gridCol>
+                <a:gridCol w="1828800">
+                  <a:extLst>
+                    <a:ext uri="{9D8B030D-6E8A-4147-A177-3AD203B41FA5}">
+                      <a16:colId xmlns:a16="http://schemas.microsoft.com/office/drawing/2014/main" val="20004"/>
+                    </a:ext>
+                  </a:extLst>
+                </a:gridCol>
+                <a:gridCol w="1737360">
+                  <a:extLst>
+                    <a:ext uri="{9D8B030D-6E8A-4147-A177-3AD203B41FA5}">
+                      <a16:colId xmlns:a16="http://schemas.microsoft.com/office/drawing/2014/main" val="20005"/>
+                    </a:ext>
+                  </a:extLst>
+                </a:gridCol>
               </a:tblGrid>
               <a:tr h="548640">
                 <a:tc>
@@ -11694,13 +12247,20 @@
                     </a:solidFill>
                   </a:tcPr>
                 </a:tc>
+                <a:extLst>
+                  <a:ext uri="{0D108BD9-81ED-4DB2-BD59-A6C34878D82A}">
+                    <a16:rowId xmlns:a16="http://schemas.microsoft.com/office/drawing/2014/main" val="10000"/>
+                  </a:ext>
+                </a:extLst>
               </a:tr>
               <a:tr h="548640">
                 <a:tc>
                   <a:txBody>
                     <a:bodyPr/>
                     <a:lstStyle/>
-                    <a:p/>
+                    <a:p>
+                      <a:endParaRPr/>
+                    </a:p>
                   </a:txBody>
                   <a:tcPr/>
                 </a:tc>
@@ -11708,7 +12268,9 @@
                   <a:txBody>
                     <a:bodyPr/>
                     <a:lstStyle/>
-                    <a:p/>
+                    <a:p>
+                      <a:endParaRPr/>
+                    </a:p>
                   </a:txBody>
                   <a:tcPr/>
                 </a:tc>
@@ -11716,7 +12278,9 @@
                   <a:txBody>
                     <a:bodyPr/>
                     <a:lstStyle/>
-                    <a:p/>
+                    <a:p>
+                      <a:endParaRPr/>
+                    </a:p>
                   </a:txBody>
                   <a:tcPr/>
                 </a:tc>
@@ -11724,7 +12288,9 @@
                   <a:txBody>
                     <a:bodyPr/>
                     <a:lstStyle/>
-                    <a:p/>
+                    <a:p>
+                      <a:endParaRPr/>
+                    </a:p>
                   </a:txBody>
                   <a:tcPr/>
                 </a:tc>
@@ -11732,7 +12298,9 @@
                   <a:txBody>
                     <a:bodyPr/>
                     <a:lstStyle/>
-                    <a:p/>
+                    <a:p>
+                      <a:endParaRPr/>
+                    </a:p>
                   </a:txBody>
                   <a:tcPr/>
                 </a:tc>
@@ -11740,10 +12308,17 @@
                   <a:txBody>
                     <a:bodyPr/>
                     <a:lstStyle/>
-                    <a:p/>
+                    <a:p>
+                      <a:endParaRPr/>
+                    </a:p>
                   </a:txBody>
                   <a:tcPr/>
                 </a:tc>
+                <a:extLst>
+                  <a:ext uri="{0D108BD9-81ED-4DB2-BD59-A6C34878D82A}">
+                    <a16:rowId xmlns:a16="http://schemas.microsoft.com/office/drawing/2014/main" val="10001"/>
+                  </a:ext>
+                </a:extLst>
               </a:tr>
             </a:tbl>
           </a:graphicData>
@@ -11758,7 +12333,7 @@
 </file>
 
 <file path=ppt/slides/slide9.xml><?xml version="1.0" encoding="utf-8"?>
-<p:sld xmlns:a="http://schemas.openxmlformats.org/drawingml/2006/main" xmlns:p="http://schemas.openxmlformats.org/presentationml/2006/main" xmlns:r="http://schemas.openxmlformats.org/officeDocument/2006/relationships">
+<p:sld xmlns:a="http://schemas.openxmlformats.org/drawingml/2006/main" xmlns:r="http://schemas.openxmlformats.org/officeDocument/2006/relationships" xmlns:p="http://schemas.openxmlformats.org/presentationml/2006/main">
   <p:cSld>
     <p:bg>
       <p:bgPr>
@@ -11774,7 +12349,14 @@
         <p:cNvGrpSpPr/>
         <p:nvPr/>
       </p:nvGrpSpPr>
-      <p:grpSpPr/>
+      <p:grpSpPr>
+        <a:xfrm>
+          <a:off x="0" y="0"/>
+          <a:ext cx="0" cy="0"/>
+          <a:chOff x="0" y="0"/>
+          <a:chExt cx="0" cy="0"/>
+        </a:xfrm>
+      </p:grpSpPr>
       <p:sp>
         <p:nvSpPr>
           <p:cNvPr id="2" name="TextBox 1"/>
@@ -11851,6 +12433,7 @@
           <a:lstStyle/>
           <a:p>
             <a:pPr algn="ctr"/>
+            <a:endParaRPr/>
           </a:p>
         </p:txBody>
       </p:sp>
@@ -12078,6 +12661,7 @@
           <a:lstStyle/>
           <a:p>
             <a:pPr algn="ctr"/>
+            <a:endParaRPr/>
           </a:p>
         </p:txBody>
       </p:sp>
@@ -12136,10 +12720,34 @@
                 <a:tableStyleId>{5C22544A-7EE6-4342-B048-85BDC9FD1C3A}</a:tableStyleId>
               </a:tblPr>
               <a:tblGrid>
-                <a:gridCol w="1188720"/>
-                <a:gridCol w="914400"/>
-                <a:gridCol w="914400"/>
-                <a:gridCol w="1645920"/>
+                <a:gridCol w="1188720">
+                  <a:extLst>
+                    <a:ext uri="{9D8B030D-6E8A-4147-A177-3AD203B41FA5}">
+                      <a16:colId xmlns:a16="http://schemas.microsoft.com/office/drawing/2014/main" val="20000"/>
+                    </a:ext>
+                  </a:extLst>
+                </a:gridCol>
+                <a:gridCol w="914400">
+                  <a:extLst>
+                    <a:ext uri="{9D8B030D-6E8A-4147-A177-3AD203B41FA5}">
+                      <a16:colId xmlns:a16="http://schemas.microsoft.com/office/drawing/2014/main" val="20001"/>
+                    </a:ext>
+                  </a:extLst>
+                </a:gridCol>
+                <a:gridCol w="914400">
+                  <a:extLst>
+                    <a:ext uri="{9D8B030D-6E8A-4147-A177-3AD203B41FA5}">
+                      <a16:colId xmlns:a16="http://schemas.microsoft.com/office/drawing/2014/main" val="20002"/>
+                    </a:ext>
+                  </a:extLst>
+                </a:gridCol>
+                <a:gridCol w="1645920">
+                  <a:extLst>
+                    <a:ext uri="{9D8B030D-6E8A-4147-A177-3AD203B41FA5}">
+                      <a16:colId xmlns:a16="http://schemas.microsoft.com/office/drawing/2014/main" val="20003"/>
+                    </a:ext>
+                  </a:extLst>
+                </a:gridCol>
               </a:tblGrid>
               <a:tr h="457200">
                 <a:tc>
@@ -12238,6 +12846,11 @@
                     </a:solidFill>
                   </a:tcPr>
                 </a:tc>
+                <a:extLst>
+                  <a:ext uri="{0D108BD9-81ED-4DB2-BD59-A6C34878D82A}">
+                    <a16:rowId xmlns:a16="http://schemas.microsoft.com/office/drawing/2014/main" val="10000"/>
+                  </a:ext>
+                </a:extLst>
               </a:tr>
               <a:tr h="457200">
                 <a:tc>
@@ -12336,6 +12949,11 @@
                     </a:solidFill>
                   </a:tcPr>
                 </a:tc>
+                <a:extLst>
+                  <a:ext uri="{0D108BD9-81ED-4DB2-BD59-A6C34878D82A}">
+                    <a16:rowId xmlns:a16="http://schemas.microsoft.com/office/drawing/2014/main" val="10001"/>
+                  </a:ext>
+                </a:extLst>
               </a:tr>
               <a:tr h="457200">
                 <a:tc>
@@ -12434,6 +13052,11 @@
                     </a:solidFill>
                   </a:tcPr>
                 </a:tc>
+                <a:extLst>
+                  <a:ext uri="{0D108BD9-81ED-4DB2-BD59-A6C34878D82A}">
+                    <a16:rowId xmlns:a16="http://schemas.microsoft.com/office/drawing/2014/main" val="10002"/>
+                  </a:ext>
+                </a:extLst>
               </a:tr>
               <a:tr h="457200">
                 <a:tc>
@@ -12532,6 +13155,11 @@
                     </a:solidFill>
                   </a:tcPr>
                 </a:tc>
+                <a:extLst>
+                  <a:ext uri="{0D108BD9-81ED-4DB2-BD59-A6C34878D82A}">
+                    <a16:rowId xmlns:a16="http://schemas.microsoft.com/office/drawing/2014/main" val="10003"/>
+                  </a:ext>
+                </a:extLst>
               </a:tr>
             </a:tbl>
           </a:graphicData>
@@ -12577,6 +13205,7 @@
           <a:lstStyle/>
           <a:p>
             <a:pPr algn="ctr"/>
+            <a:endParaRPr/>
           </a:p>
         </p:txBody>
       </p:sp>
@@ -12635,10 +13264,34 @@
                 <a:tableStyleId>{5C22544A-7EE6-4342-B048-85BDC9FD1C3A}</a:tableStyleId>
               </a:tblPr>
               <a:tblGrid>
-                <a:gridCol w="2286000"/>
-                <a:gridCol w="2743200"/>
-                <a:gridCol w="2286000"/>
-                <a:gridCol w="3017520"/>
+                <a:gridCol w="2286000">
+                  <a:extLst>
+                    <a:ext uri="{9D8B030D-6E8A-4147-A177-3AD203B41FA5}">
+                      <a16:colId xmlns:a16="http://schemas.microsoft.com/office/drawing/2014/main" val="20000"/>
+                    </a:ext>
+                  </a:extLst>
+                </a:gridCol>
+                <a:gridCol w="2743200">
+                  <a:extLst>
+                    <a:ext uri="{9D8B030D-6E8A-4147-A177-3AD203B41FA5}">
+                      <a16:colId xmlns:a16="http://schemas.microsoft.com/office/drawing/2014/main" val="20001"/>
+                    </a:ext>
+                  </a:extLst>
+                </a:gridCol>
+                <a:gridCol w="2286000">
+                  <a:extLst>
+                    <a:ext uri="{9D8B030D-6E8A-4147-A177-3AD203B41FA5}">
+                      <a16:colId xmlns:a16="http://schemas.microsoft.com/office/drawing/2014/main" val="20002"/>
+                    </a:ext>
+                  </a:extLst>
+                </a:gridCol>
+                <a:gridCol w="3017520">
+                  <a:extLst>
+                    <a:ext uri="{9D8B030D-6E8A-4147-A177-3AD203B41FA5}">
+                      <a16:colId xmlns:a16="http://schemas.microsoft.com/office/drawing/2014/main" val="20003"/>
+                    </a:ext>
+                  </a:extLst>
+                </a:gridCol>
               </a:tblGrid>
               <a:tr h="594360">
                 <a:tc>
@@ -12737,13 +13390,20 @@
                     </a:solidFill>
                   </a:tcPr>
                 </a:tc>
+                <a:extLst>
+                  <a:ext uri="{0D108BD9-81ED-4DB2-BD59-A6C34878D82A}">
+                    <a16:rowId xmlns:a16="http://schemas.microsoft.com/office/drawing/2014/main" val="10000"/>
+                  </a:ext>
+                </a:extLst>
               </a:tr>
               <a:tr h="594360">
                 <a:tc>
                   <a:txBody>
                     <a:bodyPr/>
                     <a:lstStyle/>
-                    <a:p/>
+                    <a:p>
+                      <a:endParaRPr/>
+                    </a:p>
                   </a:txBody>
                   <a:tcPr/>
                 </a:tc>
@@ -12751,7 +13411,9 @@
                   <a:txBody>
                     <a:bodyPr/>
                     <a:lstStyle/>
-                    <a:p/>
+                    <a:p>
+                      <a:endParaRPr/>
+                    </a:p>
                   </a:txBody>
                   <a:tcPr/>
                 </a:tc>
@@ -12759,7 +13421,9 @@
                   <a:txBody>
                     <a:bodyPr/>
                     <a:lstStyle/>
-                    <a:p/>
+                    <a:p>
+                      <a:endParaRPr/>
+                    </a:p>
                   </a:txBody>
                   <a:tcPr/>
                 </a:tc>
@@ -12767,10 +13431,17 @@
                   <a:txBody>
                     <a:bodyPr/>
                     <a:lstStyle/>
-                    <a:p/>
+                    <a:p>
+                      <a:endParaRPr/>
+                    </a:p>
                   </a:txBody>
                   <a:tcPr/>
                 </a:tc>
+                <a:extLst>
+                  <a:ext uri="{0D108BD9-81ED-4DB2-BD59-A6C34878D82A}">
+                    <a16:rowId xmlns:a16="http://schemas.microsoft.com/office/drawing/2014/main" val="10001"/>
+                  </a:ext>
+                </a:extLst>
               </a:tr>
             </a:tbl>
           </a:graphicData>

--- a/docs/开题展示.pptx
+++ b/docs/开题展示.pptx
@@ -3504,7 +3504,7 @@
         </p:nvGraphicFramePr>
         <p:xfrm>
           <a:off x="914400" y="1920240"/>
-          <a:ext cx="4572000" cy="1463040"/>
+          <a:ext cx="4572000" cy="1475232"/>
         </p:xfrm>
         <a:graphic>
           <a:graphicData uri="http://schemas.openxmlformats.org/drawingml/2006/table">
@@ -4383,7 +4383,7 @@
         </p:nvSpPr>
         <p:spPr>
           <a:xfrm>
-            <a:off x="731520" y="3840480"/>
+            <a:off x="746760" y="3840480"/>
             <a:ext cx="10698480" cy="2560320"/>
           </a:xfrm>
           <a:prstGeom prst="roundRect">
@@ -4428,7 +4428,7 @@
         <p:spPr>
           <a:xfrm>
             <a:off x="914400" y="3931920"/>
-            <a:ext cx="4572000" cy="457200"/>
+            <a:ext cx="4572000" cy="400110"/>
           </a:xfrm>
           <a:prstGeom prst="rect">
             <a:avLst/>
@@ -4450,7 +4450,20 @@
               </a:defRPr>
             </a:pPr>
             <a:r>
-              <a:t>时间计划 (第9-18周)</a:t>
+              <a:rPr dirty="0" err="1"/>
+              <a:t>时间计划</a:t>
+            </a:r>
+            <a:r>
+              <a:rPr dirty="0"/>
+              <a:t> (第9-1</a:t>
+            </a:r>
+            <a:r>
+              <a:rPr lang="en-US" dirty="0"/>
+              <a:t>7</a:t>
+            </a:r>
+            <a:r>
+              <a:rPr dirty="0"/>
+              <a:t>周)</a:t>
             </a:r>
           </a:p>
         </p:txBody>
@@ -4463,7 +4476,7 @@
         </p:nvSpPr>
         <p:spPr>
           <a:xfrm>
-            <a:off x="1097280" y="4480560"/>
+            <a:off x="1097280" y="4389120"/>
             <a:ext cx="1828800" cy="320040"/>
           </a:xfrm>
           <a:prstGeom prst="rect">
@@ -4486,6 +4499,7 @@
               </a:defRPr>
             </a:pPr>
             <a:r>
+              <a:rPr dirty="0"/>
               <a:t>第9-10周</a:t>
             </a:r>
           </a:p>
@@ -4499,7 +4513,7 @@
         </p:nvSpPr>
         <p:spPr>
           <a:xfrm>
-            <a:off x="3200400" y="4480560"/>
+            <a:off x="3200400" y="4389120"/>
             <a:ext cx="7315200" cy="320040"/>
           </a:xfrm>
           <a:prstGeom prst="rect">
@@ -4535,7 +4549,7 @@
         </p:nvSpPr>
         <p:spPr>
           <a:xfrm>
-            <a:off x="1097280" y="4800600"/>
+            <a:off x="1097280" y="4709160"/>
             <a:ext cx="1828800" cy="320040"/>
           </a:xfrm>
           <a:prstGeom prst="rect">
@@ -4571,7 +4585,7 @@
         </p:nvSpPr>
         <p:spPr>
           <a:xfrm>
-            <a:off x="3200400" y="4800600"/>
+            <a:off x="3200400" y="4709160"/>
             <a:ext cx="7315200" cy="320040"/>
           </a:xfrm>
           <a:prstGeom prst="rect">
@@ -4607,7 +4621,7 @@
         </p:nvSpPr>
         <p:spPr>
           <a:xfrm>
-            <a:off x="1097280" y="5120640"/>
+            <a:off x="1097280" y="5029200"/>
             <a:ext cx="1828800" cy="320040"/>
           </a:xfrm>
           <a:prstGeom prst="rect">
@@ -4643,7 +4657,7 @@
         </p:nvSpPr>
         <p:spPr>
           <a:xfrm>
-            <a:off x="3200400" y="5120640"/>
+            <a:off x="3200400" y="5029200"/>
             <a:ext cx="7315200" cy="320040"/>
           </a:xfrm>
           <a:prstGeom prst="rect">
@@ -4679,7 +4693,7 @@
         </p:nvSpPr>
         <p:spPr>
           <a:xfrm>
-            <a:off x="1097280" y="5440680"/>
+            <a:off x="1097280" y="5349240"/>
             <a:ext cx="1828800" cy="320040"/>
           </a:xfrm>
           <a:prstGeom prst="rect">
@@ -4715,7 +4729,7 @@
         </p:nvSpPr>
         <p:spPr>
           <a:xfrm>
-            <a:off x="3200400" y="5440680"/>
+            <a:off x="3200400" y="5349240"/>
             <a:ext cx="7315200" cy="320040"/>
           </a:xfrm>
           <a:prstGeom prst="rect">
@@ -4751,7 +4765,7 @@
         </p:nvSpPr>
         <p:spPr>
           <a:xfrm>
-            <a:off x="1097280" y="5760720"/>
+            <a:off x="1097280" y="5669280"/>
             <a:ext cx="1828800" cy="320040"/>
           </a:xfrm>
           <a:prstGeom prst="rect">
@@ -4774,7 +4788,8 @@
               </a:defRPr>
             </a:pPr>
             <a:r>
-              <a:t>第16-17周</a:t>
+              <a:rPr dirty="0"/>
+              <a:t>第16周</a:t>
             </a:r>
           </a:p>
         </p:txBody>
@@ -4787,7 +4802,7 @@
         </p:nvSpPr>
         <p:spPr>
           <a:xfrm>
-            <a:off x="3200400" y="5760720"/>
+            <a:off x="3200400" y="5669280"/>
             <a:ext cx="7315200" cy="320040"/>
           </a:xfrm>
           <a:prstGeom prst="rect">
@@ -4810,8 +4825,26 @@
               </a:defRPr>
             </a:pPr>
             <a:r>
-              <a:t>评估 + 可视化 + 消融实验</a:t>
-            </a:r>
+              <a:rPr dirty="0" err="1"/>
+              <a:t>评估</a:t>
+            </a:r>
+            <a:r>
+              <a:rPr dirty="0"/>
+              <a:t> + </a:t>
+            </a:r>
+            <a:r>
+              <a:rPr dirty="0" err="1"/>
+              <a:t>可视化</a:t>
+            </a:r>
+            <a:r>
+              <a:rPr dirty="0"/>
+              <a:t> + </a:t>
+            </a:r>
+            <a:r>
+              <a:rPr dirty="0" err="1"/>
+              <a:t>消融实验</a:t>
+            </a:r>
+            <a:endParaRPr dirty="0"/>
           </a:p>
         </p:txBody>
       </p:sp>
@@ -4823,7 +4856,7 @@
         </p:nvSpPr>
         <p:spPr>
           <a:xfrm>
-            <a:off x="1097280" y="6080760"/>
+            <a:off x="1097280" y="5989320"/>
             <a:ext cx="1828800" cy="320040"/>
           </a:xfrm>
           <a:prstGeom prst="rect">
@@ -4846,7 +4879,16 @@
               </a:defRPr>
             </a:pPr>
             <a:r>
-              <a:t>第18周</a:t>
+              <a:rPr dirty="0"/>
+              <a:t>第1</a:t>
+            </a:r>
+            <a:r>
+              <a:rPr lang="en-US" dirty="0"/>
+              <a:t>7</a:t>
+            </a:r>
+            <a:r>
+              <a:rPr dirty="0"/>
+              <a:t>周</a:t>
             </a:r>
           </a:p>
         </p:txBody>
@@ -4859,7 +4901,7 @@
         </p:nvSpPr>
         <p:spPr>
           <a:xfrm>
-            <a:off x="3200400" y="6080760"/>
+            <a:off x="3200400" y="5989320"/>
             <a:ext cx="7315200" cy="320040"/>
           </a:xfrm>
           <a:prstGeom prst="rect">
@@ -6144,7 +6186,7 @@
         <p:spPr>
           <a:xfrm>
             <a:off x="1828800" y="5303520"/>
-            <a:ext cx="8503920" cy="914400"/>
+            <a:ext cx="8503920" cy="338554"/>
           </a:xfrm>
           <a:prstGeom prst="rect">
             <a:avLst/>
@@ -6166,8 +6208,24 @@
               </a:defRPr>
             </a:pPr>
             <a:r>
-              <a:t>GitHub: https://github.com/your-org/mllm-agent</a:t>
-            </a:r>
+              <a:rPr dirty="0"/>
+              <a:t>GitHub: https://github.</a:t>
+            </a:r>
+            <a:r>
+              <a:t>com/</a:t>
+            </a:r>
+            <a:r>
+              <a:rPr lang="en-US"/>
+              <a:t>QAWe-ikun</a:t>
+            </a:r>
+            <a:r>
+              <a:t>/</a:t>
+            </a:r>
+            <a:r>
+              <a:rPr lang="en-US" altLang="zh-CN"/>
+              <a:t>mLLM</a:t>
+            </a:r>
+            <a:endParaRPr dirty="0"/>
           </a:p>
         </p:txBody>
       </p:sp>
@@ -9968,8 +10026,18 @@
               </a:defRPr>
             </a:pPr>
             <a:r>
-              <a:t>MobileSAM - 目标检测与定位</a:t>
-            </a:r>
+              <a:rPr dirty="0" err="1"/>
+              <a:t>MobileSAM</a:t>
+            </a:r>
+            <a:r>
+              <a:rPr dirty="0"/>
+              <a:t> - </a:t>
+            </a:r>
+            <a:r>
+              <a:rPr dirty="0" err="1"/>
+              <a:t>目标检测与定位</a:t>
+            </a:r>
+            <a:endParaRPr dirty="0"/>
           </a:p>
         </p:txBody>
       </p:sp>
@@ -10105,16 +10173,14 @@
             </a:pPr>
             <a:r>
               <a:rPr dirty="0"/>
-              <a:t>轻量版</a:t>
-            </a:r>
-            <a:r>
-              <a:t>~40M</a:t>
-            </a:r>
-            <a:r>
-              <a:rPr lang="en-US" altLang="zh-CN"/>
+              <a:t>轻量版~40M</a:t>
+            </a:r>
+            <a:r>
+              <a:rPr lang="en-US" altLang="zh-CN" dirty="0"/>
               <a:t>B</a:t>
             </a:r>
             <a:r>
+              <a:rPr dirty="0"/>
               <a:t>, </a:t>
             </a:r>
             <a:r>
@@ -10275,8 +10341,10 @@
               </a:defRPr>
             </a:pPr>
             <a:r>
+              <a:rPr dirty="0" err="1"/>
               <a:t>位置特征与视觉特征在输入LLM前进行拼接融合，形成完整的环境感知表示</a:t>
             </a:r>
+            <a:endParaRPr dirty="0"/>
           </a:p>
           <a:p>
             <a:pPr>
@@ -10291,8 +10359,18 @@
               </a:defRPr>
             </a:pPr>
             <a:r>
-              <a:t>类似Transformer中的Positional Encoding，将连续坐标映射到高维空间</a:t>
-            </a:r>
+              <a:rPr dirty="0" err="1"/>
+              <a:t>类似Transformer中的Positional</a:t>
+            </a:r>
+            <a:r>
+              <a:rPr dirty="0"/>
+              <a:t> </a:t>
+            </a:r>
+            <a:r>
+              <a:rPr dirty="0" err="1"/>
+              <a:t>Encoding，将连续坐标映射到高维空间</a:t>
+            </a:r>
+            <a:endParaRPr dirty="0"/>
           </a:p>
         </p:txBody>
       </p:sp>
@@ -10451,11 +10529,17 @@
           <p:cNvGraphicFramePr>
             <a:graphicFrameLocks noGrp="1"/>
           </p:cNvGraphicFramePr>
-          <p:nvPr/>
+          <p:nvPr>
+            <p:extLst>
+              <p:ext uri="{D42A27DB-BD31-4B8C-83A1-F6EECF244321}">
+                <p14:modId xmlns:p14="http://schemas.microsoft.com/office/powerpoint/2010/main" val="3359305040"/>
+              </p:ext>
+            </p:extLst>
+          </p:nvPr>
         </p:nvGraphicFramePr>
         <p:xfrm>
           <a:off x="1097280" y="1920240"/>
-          <a:ext cx="4389120" cy="1889760"/>
+          <a:ext cx="4389120" cy="1524000"/>
         </p:xfrm>
         <a:graphic>
           <a:graphicData uri="http://schemas.openxmlformats.org/drawingml/2006/table">
@@ -10494,8 +10578,10 @@
                         </a:defRPr>
                       </a:pPr>
                       <a:r>
+                        <a:rPr dirty="0" err="1"/>
                         <a:t>基座模型</a:t>
                       </a:r>
+                      <a:endParaRPr dirty="0"/>
                     </a:p>
                   </a:txBody>
                   <a:tcPr anchor="ctr">
@@ -10738,6 +10824,7 @@
                         </a:defRPr>
                       </a:pPr>
                       <a:r>
+                        <a:rPr dirty="0"/>
                         <a:t>~16GB</a:t>
                       </a:r>
                     </a:p>
@@ -10751,33 +10838,6 @@
                 <a:extLst>
                   <a:ext uri="{0D108BD9-81ED-4DB2-BD59-A6C34878D82A}">
                     <a16:rowId xmlns:a16="http://schemas.microsoft.com/office/drawing/2014/main" val="10004"/>
-                  </a:ext>
-                </a:extLst>
-              </a:tr>
-              <a:tr h="304800">
-                <a:tc>
-                  <a:txBody>
-                    <a:bodyPr/>
-                    <a:lstStyle/>
-                    <a:p>
-                      <a:endParaRPr/>
-                    </a:p>
-                  </a:txBody>
-                  <a:tcPr/>
-                </a:tc>
-                <a:tc>
-                  <a:txBody>
-                    <a:bodyPr/>
-                    <a:lstStyle/>
-                    <a:p>
-                      <a:endParaRPr/>
-                    </a:p>
-                  </a:txBody>
-                  <a:tcPr/>
-                </a:tc>
-                <a:extLst>
-                  <a:ext uri="{0D108BD9-81ED-4DB2-BD59-A6C34878D82A}">
-                    <a16:rowId xmlns:a16="http://schemas.microsoft.com/office/drawing/2014/main" val="10005"/>
                   </a:ext>
                 </a:extLst>
               </a:tr>
@@ -10871,11 +10931,17 @@
           <p:cNvGraphicFramePr>
             <a:graphicFrameLocks noGrp="1"/>
           </p:cNvGraphicFramePr>
-          <p:nvPr/>
+          <p:nvPr>
+            <p:extLst>
+              <p:ext uri="{D42A27DB-BD31-4B8C-83A1-F6EECF244321}">
+                <p14:modId xmlns:p14="http://schemas.microsoft.com/office/powerpoint/2010/main" val="2617353166"/>
+              </p:ext>
+            </p:extLst>
+          </p:nvPr>
         </p:nvGraphicFramePr>
         <p:xfrm>
           <a:off x="6766560" y="1920240"/>
-          <a:ext cx="4389120" cy="1889760"/>
+          <a:ext cx="4389120" cy="1524000"/>
         </p:xfrm>
         <a:graphic>
           <a:graphicData uri="http://schemas.openxmlformats.org/drawingml/2006/table">
@@ -11158,6 +11224,7 @@
                         </a:defRPr>
                       </a:pPr>
                       <a:r>
+                        <a:rPr dirty="0"/>
                         <a:t>~16-18GB</a:t>
                       </a:r>
                     </a:p>
@@ -11171,33 +11238,6 @@
                 <a:extLst>
                   <a:ext uri="{0D108BD9-81ED-4DB2-BD59-A6C34878D82A}">
                     <a16:rowId xmlns:a16="http://schemas.microsoft.com/office/drawing/2014/main" val="10004"/>
-                  </a:ext>
-                </a:extLst>
-              </a:tr>
-              <a:tr h="304800">
-                <a:tc>
-                  <a:txBody>
-                    <a:bodyPr/>
-                    <a:lstStyle/>
-                    <a:p>
-                      <a:endParaRPr/>
-                    </a:p>
-                  </a:txBody>
-                  <a:tcPr/>
-                </a:tc>
-                <a:tc>
-                  <a:txBody>
-                    <a:bodyPr/>
-                    <a:lstStyle/>
-                    <a:p>
-                      <a:endParaRPr/>
-                    </a:p>
-                  </a:txBody>
-                  <a:tcPr/>
-                </a:tc>
-                <a:extLst>
-                  <a:ext uri="{0D108BD9-81ED-4DB2-BD59-A6C34878D82A}">
-                    <a16:rowId xmlns:a16="http://schemas.microsoft.com/office/drawing/2014/main" val="10005"/>
                   </a:ext>
                 </a:extLst>
               </a:tr>
@@ -12482,7 +12522,7 @@
         <p:spPr>
           <a:xfrm>
             <a:off x="1097280" y="1828800"/>
-            <a:ext cx="4572000" cy="457200"/>
+            <a:ext cx="4572000" cy="369332"/>
           </a:xfrm>
           <a:prstGeom prst="rect">
             <a:avLst/>
@@ -12504,21 +12544,179 @@
               </a:defRPr>
             </a:pPr>
             <a:r>
-              <a:t>1. 成功率 (Success Rate)</a:t>
-            </a:r>
-          </a:p>
-        </p:txBody>
-      </p:sp>
-      <p:sp>
-        <p:nvSpPr>
-          <p:cNvPr id="6" name="TextBox 5"/>
+              <a:rPr dirty="0"/>
+              <a:t>1. </a:t>
+            </a:r>
+            <a:r>
+              <a:rPr dirty="0" err="1"/>
+              <a:t>成功率</a:t>
+            </a:r>
+            <a:r>
+              <a:rPr dirty="0"/>
+              <a:t> </a:t>
+            </a:r>
+            <a:r>
+              <a:rPr sz="1600" dirty="0"/>
+              <a:t>(Success Rate)</a:t>
+            </a:r>
+            <a:endParaRPr dirty="0"/>
+          </a:p>
+        </p:txBody>
+      </p:sp>
+      <mc:AlternateContent xmlns:mc="http://schemas.openxmlformats.org/markup-compatibility/2006">
+        <mc:Choice xmlns:a14="http://schemas.microsoft.com/office/drawing/2010/main" Requires="a14">
+          <p:sp>
+            <p:nvSpPr>
+              <p:cNvPr id="6" name="TextBox 5"/>
+              <p:cNvSpPr txBox="1"/>
+              <p:nvPr/>
+            </p:nvSpPr>
+            <p:spPr>
+              <a:xfrm>
+                <a:off x="1280160" y="2286000"/>
+                <a:ext cx="4114800" cy="338554"/>
+              </a:xfrm>
+              <a:prstGeom prst="rect">
+                <a:avLst/>
+              </a:prstGeom>
+              <a:noFill/>
+            </p:spPr>
+            <p:txBody>
+              <a:bodyPr wrap="square">
+                <a:spAutoFit/>
+              </a:bodyPr>
+              <a:lstStyle/>
+              <a:p>
+                <a:pPr algn="l">
+                  <a:defRPr sz="1600" b="0">
+                    <a:solidFill>
+                      <a:srgbClr val="CCCCCC"/>
+                    </a:solidFill>
+                    <a:latin typeface="微软雅黑"/>
+                  </a:defRPr>
+                </a:pPr>
+                <a14:m>
+                  <m:oMathPara xmlns:m="http://schemas.openxmlformats.org/officeDocument/2006/math">
+                    <m:oMathParaPr>
+                      <m:jc m:val="centerGroup"/>
+                    </m:oMathParaPr>
+                    <m:oMath xmlns:m="http://schemas.openxmlformats.org/officeDocument/2006/math">
+                      <m:r>
+                        <a:rPr lang="zh-CN" altLang="en-US" i="1" dirty="0" smtClean="0">
+                          <a:latin typeface="Cambria Math" panose="02040503050406030204" pitchFamily="18" charset="0"/>
+                        </a:rPr>
+                        <m:t>𝑆𝑅</m:t>
+                      </m:r>
+                      <m:r>
+                        <a:rPr lang="zh-CN" altLang="en-US" i="1" dirty="0" smtClean="0">
+                          <a:latin typeface="Cambria Math" panose="02040503050406030204" pitchFamily="18" charset="0"/>
+                        </a:rPr>
+                        <m:t> = </m:t>
+                      </m:r>
+                      <m:r>
+                        <a:rPr lang="zh-CN" altLang="en-US" i="1" dirty="0" err="1">
+                          <a:latin typeface="Cambria Math" panose="02040503050406030204" pitchFamily="18" charset="0"/>
+                        </a:rPr>
+                        <m:t>𝑁</m:t>
+                      </m:r>
+                      <m:r>
+                        <a:rPr lang="en-US" altLang="zh-CN" i="1" dirty="0" err="1">
+                          <a:latin typeface="Cambria Math" panose="02040503050406030204" pitchFamily="18" charset="0"/>
+                        </a:rPr>
+                        <m:t>_</m:t>
+                      </m:r>
+                      <m:r>
+                        <a:rPr lang="zh-CN" altLang="en-US" i="1" dirty="0" err="1">
+                          <a:latin typeface="Cambria Math" panose="02040503050406030204" pitchFamily="18" charset="0"/>
+                        </a:rPr>
+                        <m:t>𝑠𝑢𝑐𝑐𝑒𝑠𝑠</m:t>
+                      </m:r>
+                      <m:r>
+                        <a:rPr lang="zh-CN" altLang="en-US" i="1" dirty="0">
+                          <a:latin typeface="Cambria Math" panose="02040503050406030204" pitchFamily="18" charset="0"/>
+                        </a:rPr>
+                        <m:t> </m:t>
+                      </m:r>
+                      <m:r>
+                        <a:rPr lang="en-US" altLang="zh-CN" i="1" dirty="0">
+                          <a:latin typeface="Cambria Math" panose="02040503050406030204" pitchFamily="18" charset="0"/>
+                        </a:rPr>
+                        <m:t>/ </m:t>
+                      </m:r>
+                      <m:r>
+                        <a:rPr lang="zh-CN" altLang="en-US" i="1" dirty="0" err="1">
+                          <a:latin typeface="Cambria Math" panose="02040503050406030204" pitchFamily="18" charset="0"/>
+                        </a:rPr>
+                        <m:t>𝑁</m:t>
+                      </m:r>
+                      <m:r>
+                        <a:rPr lang="en-US" altLang="zh-CN" i="1" dirty="0" err="1">
+                          <a:latin typeface="Cambria Math" panose="02040503050406030204" pitchFamily="18" charset="0"/>
+                        </a:rPr>
+                        <m:t>_</m:t>
+                      </m:r>
+                      <m:r>
+                        <a:rPr lang="zh-CN" altLang="en-US" i="1" dirty="0" err="1">
+                          <a:latin typeface="Cambria Math" panose="02040503050406030204" pitchFamily="18" charset="0"/>
+                        </a:rPr>
+                        <m:t>𝑡𝑜𝑡𝑎𝑙</m:t>
+                      </m:r>
+                    </m:oMath>
+                  </m:oMathPara>
+                </a14:m>
+              </a:p>
+            </p:txBody>
+          </p:sp>
+        </mc:Choice>
+        <mc:Fallback>
+          <p:sp>
+            <p:nvSpPr>
+              <p:cNvPr id="6" name="TextBox 5"/>
+              <p:cNvSpPr txBox="1">
+                <a:spLocks noRot="1" noChangeAspect="1" noMove="1" noResize="1" noEditPoints="1" noAdjustHandles="1" noChangeArrowheads="1" noChangeShapeType="1" noTextEdit="1"/>
+              </p:cNvSpPr>
+              <p:nvPr/>
+            </p:nvSpPr>
+            <p:spPr>
+              <a:xfrm>
+                <a:off x="1280160" y="2286000"/>
+                <a:ext cx="4114800" cy="338554"/>
+              </a:xfrm>
+              <a:prstGeom prst="rect">
+                <a:avLst/>
+              </a:prstGeom>
+              <a:blipFill>
+                <a:blip r:embed="rId2"/>
+                <a:stretch>
+                  <a:fillRect t="-7143" b="-19643"/>
+                </a:stretch>
+              </a:blipFill>
+            </p:spPr>
+            <p:txBody>
+              <a:bodyPr/>
+              <a:lstStyle/>
+              <a:p>
+                <a:r>
+                  <a:rPr lang="zh-CN" altLang="en-US">
+                    <a:noFill/>
+                  </a:rPr>
+                  <a:t> </a:t>
+                </a:r>
+              </a:p>
+            </p:txBody>
+          </p:sp>
+        </mc:Fallback>
+      </mc:AlternateContent>
+      <p:sp>
+        <p:nvSpPr>
+          <p:cNvPr id="7" name="TextBox 6"/>
           <p:cNvSpPr txBox="1"/>
           <p:nvPr/>
         </p:nvSpPr>
         <p:spPr>
           <a:xfrm>
-            <a:off x="1280160" y="2286000"/>
-            <a:ext cx="4114800" cy="457200"/>
+            <a:off x="1097280" y="2743200"/>
+            <a:ext cx="4733069" cy="369332"/>
           </a:xfrm>
           <a:prstGeom prst="rect">
             <a:avLst/>
@@ -12532,95 +12730,111 @@
           <a:lstStyle/>
           <a:p>
             <a:pPr algn="l">
-              <a:defRPr sz="1600" b="0">
-                <a:solidFill>
-                  <a:srgbClr val="CCCCCC"/>
+              <a:defRPr sz="1800" b="1">
+                <a:solidFill>
+                  <a:srgbClr val="107C10"/>
                 </a:solidFill>
                 <a:latin typeface="微软雅黑"/>
               </a:defRPr>
             </a:pPr>
             <a:r>
-              <a:t>SR = N_success / N_total</a:t>
-            </a:r>
-          </a:p>
-        </p:txBody>
-      </p:sp>
-      <p:sp>
-        <p:nvSpPr>
-          <p:cNvPr id="7" name="TextBox 6"/>
-          <p:cNvSpPr txBox="1"/>
-          <p:nvPr/>
-        </p:nvSpPr>
-        <p:spPr>
-          <a:xfrm>
-            <a:off x="1097280" y="2743200"/>
-            <a:ext cx="4572000" cy="457200"/>
-          </a:xfrm>
-          <a:prstGeom prst="rect">
-            <a:avLst/>
-          </a:prstGeom>
-          <a:noFill/>
-        </p:spPr>
-        <p:txBody>
-          <a:bodyPr wrap="square">
-            <a:spAutoFit/>
-          </a:bodyPr>
-          <a:lstStyle/>
-          <a:p>
-            <a:pPr algn="l">
-              <a:defRPr sz="1800" b="1">
-                <a:solidFill>
-                  <a:srgbClr val="107C10"/>
-                </a:solidFill>
-                <a:latin typeface="微软雅黑"/>
-              </a:defRPr>
-            </a:pPr>
-            <a:r>
-              <a:t>2. SPL (Success weighted by Path Length)</a:t>
-            </a:r>
-          </a:p>
-        </p:txBody>
-      </p:sp>
-      <p:sp>
-        <p:nvSpPr>
-          <p:cNvPr id="8" name="TextBox 7"/>
-          <p:cNvSpPr txBox="1"/>
-          <p:nvPr/>
-        </p:nvSpPr>
-        <p:spPr>
-          <a:xfrm>
-            <a:off x="1280160" y="3200400"/>
-            <a:ext cx="4114800" cy="640080"/>
-          </a:xfrm>
-          <a:prstGeom prst="rect">
-            <a:avLst/>
-          </a:prstGeom>
-          <a:noFill/>
-        </p:spPr>
-        <p:txBody>
-          <a:bodyPr wrap="square">
-            <a:spAutoFit/>
-          </a:bodyPr>
-          <a:lstStyle/>
-          <a:p>
-            <a:pPr algn="l">
-              <a:defRPr sz="1500" b="0">
-                <a:solidFill>
-                  <a:srgbClr val="CCCCCC"/>
-                </a:solidFill>
-                <a:latin typeface="微软雅黑"/>
-              </a:defRPr>
-            </a:pPr>
-            <a:r>
-              <a:t>SPL = (1/N) Σ Sᵢ · lᵢ*/max(lᵢ*, lᵢ)</a:t>
-            </a:r>
-            <a:br/>
-            <a:r>
-              <a:t>同时衡量成功率和路径效率</a:t>
-            </a:r>
-          </a:p>
-        </p:txBody>
-      </p:sp>
+              <a:rPr dirty="0"/>
+              <a:t>2. SPL </a:t>
+            </a:r>
+            <a:r>
+              <a:rPr sz="1600" dirty="0"/>
+              <a:t>(Success weighted by Path Length)</a:t>
+            </a:r>
+            <a:endParaRPr dirty="0"/>
+          </a:p>
+        </p:txBody>
+      </p:sp>
+      <mc:AlternateContent xmlns:mc="http://schemas.openxmlformats.org/markup-compatibility/2006">
+        <mc:Choice xmlns:a14="http://schemas.microsoft.com/office/drawing/2010/main" Requires="a14">
+          <p:sp>
+            <p:nvSpPr>
+              <p:cNvPr id="8" name="TextBox 7"/>
+              <p:cNvSpPr txBox="1"/>
+              <p:nvPr/>
+            </p:nvSpPr>
+            <p:spPr>
+              <a:xfrm>
+                <a:off x="1280160" y="3200400"/>
+                <a:ext cx="4114800" cy="553998"/>
+              </a:xfrm>
+              <a:prstGeom prst="rect">
+                <a:avLst/>
+              </a:prstGeom>
+              <a:noFill/>
+            </p:spPr>
+            <p:txBody>
+              <a:bodyPr wrap="square">
+                <a:spAutoFit/>
+              </a:bodyPr>
+              <a:lstStyle/>
+              <a:p>
+                <a:pPr algn="l">
+                  <a:defRPr sz="1500" b="0">
+                    <a:solidFill>
+                      <a:srgbClr val="CCCCCC"/>
+                    </a:solidFill>
+                    <a:latin typeface="微软雅黑"/>
+                  </a:defRPr>
+                </a:pPr>
+                <a14:m/>
+                <a:br>
+                  <a:rPr lang="en-US" i="1" dirty="0">
+                    <a:latin typeface="Cambria Math" panose="02040503050406030204" pitchFamily="18" charset="0"/>
+                  </a:rPr>
+                </a:br>
+                <a:r>
+                  <a:rPr dirty="0" err="1"/>
+                  <a:t>同时衡量成功率和路径效率</a:t>
+                </a:r>
+                <a:endParaRPr dirty="0"/>
+              </a:p>
+            </p:txBody>
+          </p:sp>
+        </mc:Choice>
+        <mc:Fallback>
+          <p:sp>
+            <p:nvSpPr>
+              <p:cNvPr id="8" name="TextBox 7"/>
+              <p:cNvSpPr txBox="1">
+                <a:spLocks noRot="1" noChangeAspect="1" noMove="1" noResize="1" noEditPoints="1" noAdjustHandles="1" noChangeArrowheads="1" noChangeShapeType="1" noTextEdit="1"/>
+              </p:cNvSpPr>
+              <p:nvPr/>
+            </p:nvSpPr>
+            <p:spPr>
+              <a:xfrm>
+                <a:off x="1280160" y="3200400"/>
+                <a:ext cx="4114800" cy="553998"/>
+              </a:xfrm>
+              <a:prstGeom prst="rect">
+                <a:avLst/>
+              </a:prstGeom>
+              <a:blipFill>
+                <a:blip r:embed="rId3"/>
+                <a:stretch>
+                  <a:fillRect l="-593" b="-10989"/>
+                </a:stretch>
+              </a:blipFill>
+            </p:spPr>
+            <p:txBody>
+              <a:bodyPr/>
+              <a:lstStyle/>
+              <a:p>
+                <a:r>
+                  <a:rPr lang="zh-CN" altLang="en-US">
+                    <a:noFill/>
+                  </a:rPr>
+                  <a:t> </a:t>
+                </a:r>
+              </a:p>
+            </p:txBody>
+          </p:sp>
+        </mc:Fallback>
+      </mc:AlternateContent>
       <p:sp>
         <p:nvSpPr>
           <p:cNvPr id="9" name="Rounded Rectangle 8"/>
@@ -12711,7 +12925,7 @@
         </p:nvGraphicFramePr>
         <p:xfrm>
           <a:off x="6583680" y="1828800"/>
-          <a:ext cx="4663440" cy="1828800"/>
+          <a:ext cx="4663440" cy="1889760"/>
         </p:xfrm>
         <a:graphic>
           <a:graphicData uri="http://schemas.openxmlformats.org/drawingml/2006/table">
@@ -12867,6 +13081,7 @@
                         </a:defRPr>
                       </a:pPr>
                       <a:r>
+                        <a:rPr dirty="0"/>
                         <a:t>Baseline-A</a:t>
                       </a:r>
                     </a:p>
@@ -12891,6 +13106,7 @@
                         </a:defRPr>
                       </a:pPr>
                       <a:r>
+                        <a:rPr dirty="0"/>
                         <a:t>CLIP</a:t>
                       </a:r>
                     </a:p>
@@ -12939,8 +13155,10 @@
                         </a:defRPr>
                       </a:pPr>
                       <a:r>
+                        <a:rPr dirty="0" err="1"/>
                         <a:t>纯视觉导航</a:t>
                       </a:r>
+                      <a:endParaRPr dirty="0"/>
                     </a:p>
                   </a:txBody>
                   <a:tcPr anchor="ctr">
@@ -12994,6 +13212,7 @@
                         </a:defRPr>
                       </a:pPr>
                       <a:r>
+                        <a:rPr dirty="0"/>
                         <a:t>CLIP+SAM</a:t>
                       </a:r>
                     </a:p>
@@ -13042,8 +13261,10 @@
                         </a:defRPr>
                       </a:pPr>
                       <a:r>
+                        <a:rPr dirty="0" err="1"/>
                         <a:t>无位置编码</a:t>
                       </a:r>
+                      <a:endParaRPr dirty="0"/>
                     </a:p>
                   </a:txBody>
                   <a:tcPr anchor="ctr">
@@ -13097,6 +13318,7 @@
                         </a:defRPr>
                       </a:pPr>
                       <a:r>
+                        <a:rPr dirty="0"/>
                         <a:t>CLIP+SAM</a:t>
                       </a:r>
                     </a:p>
@@ -13121,8 +13343,14 @@
                         </a:defRPr>
                       </a:pPr>
                       <a:r>
-                        <a:t>✓+位置</a:t>
-                      </a:r>
+                        <a:rPr dirty="0"/>
+                        <a:t>✓+</a:t>
+                      </a:r>
+                      <a:r>
+                        <a:rPr dirty="0" err="1"/>
+                        <a:t>位置</a:t>
+                      </a:r>
+                      <a:endParaRPr dirty="0"/>
                     </a:p>
                   </a:txBody>
                   <a:tcPr anchor="ctr">
@@ -13145,8 +13373,10 @@
                         </a:defRPr>
                       </a:pPr>
                       <a:r>
+                        <a:rPr dirty="0" err="1"/>
                         <a:t>完整模型</a:t>
                       </a:r>
+                      <a:endParaRPr dirty="0"/>
                     </a:p>
                   </a:txBody>
                   <a:tcPr anchor="ctr">
@@ -13173,8 +13403,8 @@
         </p:nvSpPr>
         <p:spPr>
           <a:xfrm>
-            <a:off x="731520" y="4206240"/>
-            <a:ext cx="10698480" cy="2194560"/>
+            <a:off x="746760" y="4206240"/>
+            <a:ext cx="10698480" cy="1636692"/>
           </a:xfrm>
           <a:prstGeom prst="roundRect">
             <a:avLst/>
@@ -13251,11 +13481,17 @@
           <p:cNvGraphicFramePr>
             <a:graphicFrameLocks noGrp="1"/>
           </p:cNvGraphicFramePr>
-          <p:nvPr/>
+          <p:nvPr>
+            <p:extLst>
+              <p:ext uri="{D42A27DB-BD31-4B8C-83A1-F6EECF244321}">
+                <p14:modId xmlns:p14="http://schemas.microsoft.com/office/powerpoint/2010/main" val="2767299137"/>
+              </p:ext>
+            </p:extLst>
+          </p:nvPr>
         </p:nvGraphicFramePr>
         <p:xfrm>
           <a:off x="914400" y="4846320"/>
-          <a:ext cx="10332720" cy="1188720"/>
+          <a:ext cx="10332720" cy="594360"/>
         </p:xfrm>
         <a:graphic>
           <a:graphicData uri="http://schemas.openxmlformats.org/drawingml/2006/table">
@@ -13380,8 +13616,18 @@
                         </a:defRPr>
                       </a:pPr>
                       <a:r>
-                        <a:t>实际路径/最优路径比值</a:t>
-                      </a:r>
+                        <a:rPr dirty="0" err="1"/>
+                        <a:t>实际路径</a:t>
+                      </a:r>
+                      <a:r>
+                        <a:rPr dirty="0"/>
+                        <a:t>/</a:t>
+                      </a:r>
+                      <a:r>
+                        <a:rPr dirty="0" err="1"/>
+                        <a:t>最优路径比值</a:t>
+                      </a:r>
+                      <a:endParaRPr dirty="0"/>
                     </a:p>
                   </a:txBody>
                   <a:tcPr anchor="ctr">
@@ -13393,53 +13639,6 @@
                 <a:extLst>
                   <a:ext uri="{0D108BD9-81ED-4DB2-BD59-A6C34878D82A}">
                     <a16:rowId xmlns:a16="http://schemas.microsoft.com/office/drawing/2014/main" val="10000"/>
-                  </a:ext>
-                </a:extLst>
-              </a:tr>
-              <a:tr h="594360">
-                <a:tc>
-                  <a:txBody>
-                    <a:bodyPr/>
-                    <a:lstStyle/>
-                    <a:p>
-                      <a:endParaRPr/>
-                    </a:p>
-                  </a:txBody>
-                  <a:tcPr/>
-                </a:tc>
-                <a:tc>
-                  <a:txBody>
-                    <a:bodyPr/>
-                    <a:lstStyle/>
-                    <a:p>
-                      <a:endParaRPr/>
-                    </a:p>
-                  </a:txBody>
-                  <a:tcPr/>
-                </a:tc>
-                <a:tc>
-                  <a:txBody>
-                    <a:bodyPr/>
-                    <a:lstStyle/>
-                    <a:p>
-                      <a:endParaRPr/>
-                    </a:p>
-                  </a:txBody>
-                  <a:tcPr/>
-                </a:tc>
-                <a:tc>
-                  <a:txBody>
-                    <a:bodyPr/>
-                    <a:lstStyle/>
-                    <a:p>
-                      <a:endParaRPr/>
-                    </a:p>
-                  </a:txBody>
-                  <a:tcPr/>
-                </a:tc>
-                <a:extLst>
-                  <a:ext uri="{0D108BD9-81ED-4DB2-BD59-A6C34878D82A}">
-                    <a16:rowId xmlns:a16="http://schemas.microsoft.com/office/drawing/2014/main" val="10001"/>
                   </a:ext>
                 </a:extLst>
               </a:tr>

--- a/docs/开题展示.pptx
+++ b/docs/开题展示.pptx
@@ -313,7 +313,7 @@
           <a:p>
             <a:fld id="{5BCAD085-E8A6-8845-BD4E-CB4CCA059FC4}" type="datetimeFigureOut">
               <a:rPr lang="en-US" smtClean="0"/>
-              <a:t>5/5/2026</a:t>
+              <a:t>5/7/2026</a:t>
             </a:fld>
             <a:endParaRPr lang="en-US"/>
           </a:p>
@@ -481,7 +481,7 @@
           <a:p>
             <a:fld id="{5BCAD085-E8A6-8845-BD4E-CB4CCA059FC4}" type="datetimeFigureOut">
               <a:rPr lang="en-US" smtClean="0"/>
-              <a:t>5/5/2026</a:t>
+              <a:t>5/7/2026</a:t>
             </a:fld>
             <a:endParaRPr lang="en-US"/>
           </a:p>
@@ -659,7 +659,7 @@
           <a:p>
             <a:fld id="{5BCAD085-E8A6-8845-BD4E-CB4CCA059FC4}" type="datetimeFigureOut">
               <a:rPr lang="en-US" smtClean="0"/>
-              <a:t>5/5/2026</a:t>
+              <a:t>5/7/2026</a:t>
             </a:fld>
             <a:endParaRPr lang="en-US"/>
           </a:p>
@@ -827,7 +827,7 @@
           <a:p>
             <a:fld id="{5BCAD085-E8A6-8845-BD4E-CB4CCA059FC4}" type="datetimeFigureOut">
               <a:rPr lang="en-US" smtClean="0"/>
-              <a:t>5/5/2026</a:t>
+              <a:t>5/7/2026</a:t>
             </a:fld>
             <a:endParaRPr lang="en-US"/>
           </a:p>
@@ -1072,7 +1072,7 @@
           <a:p>
             <a:fld id="{5BCAD085-E8A6-8845-BD4E-CB4CCA059FC4}" type="datetimeFigureOut">
               <a:rPr lang="en-US" smtClean="0"/>
-              <a:t>5/5/2026</a:t>
+              <a:t>5/7/2026</a:t>
             </a:fld>
             <a:endParaRPr lang="en-US"/>
           </a:p>
@@ -1357,7 +1357,7 @@
           <a:p>
             <a:fld id="{5BCAD085-E8A6-8845-BD4E-CB4CCA059FC4}" type="datetimeFigureOut">
               <a:rPr lang="en-US" smtClean="0"/>
-              <a:t>5/5/2026</a:t>
+              <a:t>5/7/2026</a:t>
             </a:fld>
             <a:endParaRPr lang="en-US"/>
           </a:p>
@@ -1776,7 +1776,7 @@
           <a:p>
             <a:fld id="{5BCAD085-E8A6-8845-BD4E-CB4CCA059FC4}" type="datetimeFigureOut">
               <a:rPr lang="en-US" smtClean="0"/>
-              <a:t>5/5/2026</a:t>
+              <a:t>5/7/2026</a:t>
             </a:fld>
             <a:endParaRPr lang="en-US"/>
           </a:p>
@@ -1893,7 +1893,7 @@
           <a:p>
             <a:fld id="{5BCAD085-E8A6-8845-BD4E-CB4CCA059FC4}" type="datetimeFigureOut">
               <a:rPr lang="en-US" smtClean="0"/>
-              <a:t>5/5/2026</a:t>
+              <a:t>5/7/2026</a:t>
             </a:fld>
             <a:endParaRPr lang="en-US"/>
           </a:p>
@@ -1988,7 +1988,7 @@
           <a:p>
             <a:fld id="{5BCAD085-E8A6-8845-BD4E-CB4CCA059FC4}" type="datetimeFigureOut">
               <a:rPr lang="en-US" smtClean="0"/>
-              <a:t>5/5/2026</a:t>
+              <a:t>5/7/2026</a:t>
             </a:fld>
             <a:endParaRPr lang="en-US"/>
           </a:p>
@@ -2263,7 +2263,7 @@
           <a:p>
             <a:fld id="{5BCAD085-E8A6-8845-BD4E-CB4CCA059FC4}" type="datetimeFigureOut">
               <a:rPr lang="en-US" smtClean="0"/>
-              <a:t>5/5/2026</a:t>
+              <a:t>5/7/2026</a:t>
             </a:fld>
             <a:endParaRPr lang="en-US"/>
           </a:p>
@@ -2515,7 +2515,7 @@
           <a:p>
             <a:fld id="{5BCAD085-E8A6-8845-BD4E-CB4CCA059FC4}" type="datetimeFigureOut">
               <a:rPr lang="en-US" smtClean="0"/>
-              <a:t>5/5/2026</a:t>
+              <a:t>5/7/2026</a:t>
             </a:fld>
             <a:endParaRPr lang="en-US"/>
           </a:p>
@@ -2726,7 +2726,7 @@
           <a:p>
             <a:fld id="{5BCAD085-E8A6-8845-BD4E-CB4CCA059FC4}" type="datetimeFigureOut">
               <a:rPr lang="en-US" smtClean="0"/>
-              <a:t>5/5/2026</a:t>
+              <a:t>5/7/2026</a:t>
             </a:fld>
             <a:endParaRPr lang="en-US"/>
           </a:p>
@@ -4276,6 +4276,7 @@
                         </a:defRPr>
                       </a:pPr>
                       <a:r>
+                        <a:rPr dirty="0"/>
                         <a:t>~10小时</a:t>
                       </a:r>
                     </a:p>
@@ -4355,6 +4356,7 @@
                         </a:defRPr>
                       </a:pPr>
                       <a:r>
+                        <a:rPr dirty="0"/>
                         <a:t>~5分钟</a:t>
                       </a:r>
                     </a:p>
@@ -6941,7 +6943,7 @@
         <p:spPr>
           <a:xfrm>
             <a:off x="1005840" y="1828800"/>
-            <a:ext cx="3017520" cy="2011680"/>
+            <a:ext cx="3017520" cy="1733808"/>
           </a:xfrm>
           <a:prstGeom prst="rect">
             <a:avLst/>
@@ -6966,8 +6968,14 @@
               </a:defRPr>
             </a:pPr>
             <a:r>
+              <a:rPr lang="en-US" dirty="0"/>
+              <a:t>1. </a:t>
+            </a:r>
+            <a:r>
+              <a:rPr dirty="0" err="1"/>
               <a:t>自然语言指令</a:t>
             </a:r>
+            <a:endParaRPr dirty="0"/>
           </a:p>
           <a:p>
             <a:pPr>
@@ -6982,6 +6990,7 @@
               </a:defRPr>
             </a:pPr>
             <a:r>
+              <a:rPr dirty="0"/>
               <a:t>"Go to the microwave"</a:t>
             </a:r>
           </a:p>
@@ -6998,8 +7007,14 @@
               </a:defRPr>
             </a:pPr>
             <a:r>
+              <a:rPr lang="en-US" dirty="0"/>
+              <a:t>2. </a:t>
+            </a:r>
+            <a:r>
+              <a:rPr dirty="0" err="1"/>
               <a:t>第一人称RGB图像</a:t>
             </a:r>
+            <a:endParaRPr dirty="0"/>
           </a:p>
           <a:p>
             <a:pPr>
@@ -7014,6 +7029,7 @@
               </a:defRPr>
             </a:pPr>
             <a:r>
+              <a:rPr dirty="0"/>
               <a:t>300×300像素</a:t>
             </a:r>
           </a:p>
@@ -7030,8 +7046,14 @@
               </a:defRPr>
             </a:pPr>
             <a:r>
+              <a:rPr lang="en-US" dirty="0"/>
+              <a:t>3. </a:t>
+            </a:r>
+            <a:r>
+              <a:rPr dirty="0" err="1"/>
               <a:t>Agent自身状态</a:t>
             </a:r>
+            <a:endParaRPr dirty="0"/>
           </a:p>
           <a:p>
             <a:pPr>
@@ -7046,7 +7068,16 @@
               </a:defRPr>
             </a:pPr>
             <a:r>
-              <a:t>[x,y,z,rotation]</a:t>
+              <a:rPr dirty="0"/>
+              <a:t>[</a:t>
+            </a:r>
+            <a:r>
+              <a:rPr dirty="0" err="1"/>
+              <a:t>x,y,z,rotation</a:t>
+            </a:r>
+            <a:r>
+              <a:rPr dirty="0"/>
+              <a:t>]</a:t>
             </a:r>
           </a:p>
         </p:txBody>
@@ -8292,8 +8323,10 @@
                         </a:defRPr>
                       </a:pPr>
                       <a:r>
+                        <a:rPr dirty="0" err="1"/>
                         <a:t>架构设计核心灵感</a:t>
                       </a:r>
+                      <a:endParaRPr dirty="0"/>
                     </a:p>
                   </a:txBody>
                   <a:tcPr anchor="ctr">
@@ -8395,8 +8428,10 @@
                         </a:defRPr>
                       </a:pPr>
                       <a:r>
+                        <a:rPr dirty="0" err="1"/>
                         <a:t>SFT+PPO两阶段策略</a:t>
                       </a:r>
+                      <a:endParaRPr dirty="0"/>
                     </a:p>
                   </a:txBody>
                   <a:tcPr anchor="ctr">
@@ -8498,8 +8533,10 @@
                         </a:defRPr>
                       </a:pPr>
                       <a:r>
+                        <a:rPr dirty="0" err="1"/>
                         <a:t>纯RL方法可行性证明</a:t>
                       </a:r>
+                      <a:endParaRPr dirty="0"/>
                     </a:p>
                   </a:txBody>
                   <a:tcPr anchor="ctr">
@@ -8601,8 +8638,10 @@
                         </a:defRPr>
                       </a:pPr>
                       <a:r>
+                        <a:rPr dirty="0" err="1"/>
                         <a:t>CLIP特征融合方式</a:t>
                       </a:r>
+                      <a:endParaRPr dirty="0"/>
                     </a:p>
                   </a:txBody>
                   <a:tcPr anchor="ctr">
@@ -8704,8 +8743,10 @@
                         </a:defRPr>
                       </a:pPr>
                       <a:r>
+                        <a:rPr dirty="0" err="1"/>
                         <a:t>视觉编码组件</a:t>
                       </a:r>
+                      <a:endParaRPr dirty="0"/>
                     </a:p>
                   </a:txBody>
                   <a:tcPr anchor="ctr">
@@ -8807,8 +8848,10 @@
                         </a:defRPr>
                       </a:pPr>
                       <a:r>
+                        <a:rPr dirty="0" err="1"/>
                         <a:t>VLA决策基座模型</a:t>
                       </a:r>
+                      <a:endParaRPr dirty="0"/>
                     </a:p>
                   </a:txBody>
                   <a:tcPr anchor="ctr">
@@ -9101,7 +9144,7 @@
         <p:spPr>
           <a:xfrm>
             <a:off x="4297680" y="1554480"/>
-            <a:ext cx="3200400" cy="548640"/>
+            <a:ext cx="3200400" cy="523220"/>
           </a:xfrm>
           <a:prstGeom prst="rect">
             <a:avLst/>
@@ -9123,7 +9166,16 @@
               </a:defRPr>
             </a:pPr>
             <a:r>
-              <a:t>CLIP + MobileSAM + Position Encoder</a:t>
+              <a:rPr dirty="0"/>
+              <a:t>CLIP + </a:t>
+            </a:r>
+            <a:r>
+              <a:rPr dirty="0" err="1"/>
+              <a:t>MobileSAM</a:t>
+            </a:r>
+            <a:r>
+              <a:rPr dirty="0"/>
+              <a:t> + Position Encoder</a:t>
             </a:r>
           </a:p>
         </p:txBody>
@@ -9341,7 +9393,7 @@
         <p:spPr>
           <a:xfrm>
             <a:off x="2011680" y="3017520"/>
-            <a:ext cx="3657600" cy="457200"/>
+            <a:ext cx="5358048" cy="400110"/>
           </a:xfrm>
           <a:prstGeom prst="rect">
             <a:avLst/>
@@ -9363,7 +9415,20 @@
               </a:defRPr>
             </a:pPr>
             <a:r>
-              <a:t>VLA决策层: Qwen3-VL 8B (QLoRA 4bit)</a:t>
+              <a:rPr dirty="0" err="1"/>
+              <a:t>VLA决策层</a:t>
+            </a:r>
+            <a:r>
+              <a:rPr dirty="0"/>
+              <a:t>: Qwen3-VL 8B (</a:t>
+            </a:r>
+            <a:r>
+              <a:rPr dirty="0" err="1"/>
+              <a:t>QLoRA</a:t>
+            </a:r>
+            <a:r>
+              <a:rPr dirty="0"/>
+              <a:t> 4bit)</a:t>
             </a:r>
           </a:p>
         </p:txBody>
@@ -9377,7 +9442,7 @@
         <p:spPr>
           <a:xfrm>
             <a:off x="2194560" y="3566160"/>
-            <a:ext cx="7772400" cy="1097280"/>
+            <a:ext cx="7772400" cy="913070"/>
           </a:xfrm>
           <a:prstGeom prst="rect">
             <a:avLst/>
@@ -9402,8 +9467,14 @@
               </a:defRPr>
             </a:pPr>
             <a:r>
-              <a:t>Multi-Modal Projector: visual tokens → LLM embedding空间</a:t>
-            </a:r>
+              <a:rPr dirty="0"/>
+              <a:t>Multi-Modal Projector: visual tokens → LLM </a:t>
+            </a:r>
+            <a:r>
+              <a:rPr dirty="0" err="1"/>
+              <a:t>embedding空间</a:t>
+            </a:r>
+            <a:endParaRPr dirty="0"/>
           </a:p>
           <a:p>
             <a:pPr>
@@ -9418,7 +9489,16 @@
               </a:defRPr>
             </a:pPr>
             <a:r>
-              <a:t>32层Transformer (LoRA adapter, rank=16, alpha=32)</a:t>
+              <a:rPr dirty="0"/>
+              <a:t>32层Transformer (</a:t>
+            </a:r>
+            <a:r>
+              <a:rPr dirty="0" err="1"/>
+              <a:t>LoRA</a:t>
+            </a:r>
+            <a:r>
+              <a:rPr dirty="0"/>
+              <a:t> adapter, rank=16, alpha=32)</a:t>
             </a:r>
           </a:p>
           <a:p>
@@ -9434,7 +9514,8 @@
               </a:defRPr>
             </a:pPr>
             <a:r>
-              <a:t>Action Head: 6个特殊动作token加入词表(idx 32000-32005)</a:t>
+              <a:rPr dirty="0"/>
+              <a:t>Action Head: 6个特殊动作token加入词表</a:t>
             </a:r>
           </a:p>
         </p:txBody>
@@ -10279,8 +10360,8 @@
         </p:nvSpPr>
         <p:spPr>
           <a:xfrm>
-            <a:off x="1097280" y="4572000"/>
-            <a:ext cx="9144000" cy="365760"/>
+            <a:off x="1097279" y="4572000"/>
+            <a:ext cx="9510599" cy="338554"/>
           </a:xfrm>
           <a:prstGeom prst="rect">
             <a:avLst/>
@@ -10302,8 +10383,22 @@
               </a:defRPr>
             </a:pPr>
             <a:r>
-              <a:t>[x, y, z, rotation]  →  归一化到[0,1]  →  Sinusoidal PE  →  Linear(256→4096)  →  [1, 4096]状态特征</a:t>
-            </a:r>
+              <a:rPr dirty="0"/>
+              <a:t>[x, y, z, rotation]  →  </a:t>
+            </a:r>
+            <a:r>
+              <a:rPr dirty="0" err="1"/>
+              <a:t>归一化到</a:t>
+            </a:r>
+            <a:r>
+              <a:rPr dirty="0"/>
+              <a:t>[0,1]  →  Sinusoidal PE  →  Linear(256→4096)  →  [1, 4096]</a:t>
+            </a:r>
+            <a:r>
+              <a:rPr dirty="0" err="1"/>
+              <a:t>状态特征</a:t>
+            </a:r>
+            <a:endParaRPr dirty="0"/>
           </a:p>
         </p:txBody>
       </p:sp>
@@ -10315,7 +10410,7 @@
         </p:nvSpPr>
         <p:spPr>
           <a:xfrm>
-            <a:off x="1097280" y="5120640"/>
+            <a:off x="1097280" y="5029200"/>
             <a:ext cx="9144000" cy="1097280"/>
           </a:xfrm>
           <a:prstGeom prst="rect">
@@ -11985,7 +12080,7 @@
         <p:spPr>
           <a:xfrm>
             <a:off x="731520" y="4389120"/>
-            <a:ext cx="10698480" cy="2011680"/>
+            <a:ext cx="10698480" cy="1814539"/>
           </a:xfrm>
           <a:prstGeom prst="roundRect">
             <a:avLst/>
@@ -12062,11 +12157,17 @@
           <p:cNvGraphicFramePr>
             <a:graphicFrameLocks noGrp="1"/>
           </p:cNvGraphicFramePr>
-          <p:nvPr/>
+          <p:nvPr>
+            <p:extLst>
+              <p:ext uri="{D42A27DB-BD31-4B8C-83A1-F6EECF244321}">
+                <p14:modId xmlns:p14="http://schemas.microsoft.com/office/powerpoint/2010/main" val="2763021684"/>
+              </p:ext>
+            </p:extLst>
+          </p:nvPr>
         </p:nvGraphicFramePr>
         <p:xfrm>
-          <a:off x="914400" y="5029200"/>
-          <a:ext cx="10332720" cy="1097280"/>
+          <a:off x="929640" y="5159230"/>
+          <a:ext cx="10332720" cy="548640"/>
         </p:xfrm>
         <a:graphic>
           <a:graphicData uri="http://schemas.openxmlformats.org/drawingml/2006/table">
@@ -12133,10 +12234,14 @@
                         </a:defRPr>
                       </a:pPr>
                       <a:r>
+                        <a:rPr dirty="0" err="1"/>
                         <a:t>到达目标</a:t>
                       </a:r>
-                      <a:br/>
-                      <a:r>
+                      <a:br>
+                        <a:rPr dirty="0"/>
+                      </a:br>
+                      <a:r>
+                        <a:rPr dirty="0"/>
                         <a:t>+10.0</a:t>
                       </a:r>
                     </a:p>
@@ -12217,10 +12322,14 @@
                         </a:defRPr>
                       </a:pPr>
                       <a:r>
+                        <a:rPr dirty="0" err="1"/>
                         <a:t>靠近目标</a:t>
                       </a:r>
-                      <a:br/>
-                      <a:r>
+                      <a:br>
+                        <a:rPr dirty="0"/>
+                      </a:br>
+                      <a:r>
+                        <a:rPr dirty="0"/>
                         <a:t>+0.05/步</a:t>
                       </a:r>
                     </a:p>
@@ -12273,10 +12382,22 @@
                         </a:defRPr>
                       </a:pPr>
                       <a:r>
-                        <a:t>碰撞/越界</a:t>
-                      </a:r>
-                      <a:br/>
-                      <a:r>
+                        <a:rPr dirty="0" err="1"/>
+                        <a:t>碰撞</a:t>
+                      </a:r>
+                      <a:r>
+                        <a:rPr dirty="0"/>
+                        <a:t>/</a:t>
+                      </a:r>
+                      <a:r>
+                        <a:rPr dirty="0" err="1"/>
+                        <a:t>越界</a:t>
+                      </a:r>
+                      <a:br>
+                        <a:rPr dirty="0"/>
+                      </a:br>
+                      <a:r>
+                        <a:rPr dirty="0"/>
                         <a:t>-1.0</a:t>
                       </a:r>
                     </a:p>
@@ -12290,73 +12411,6 @@
                 <a:extLst>
                   <a:ext uri="{0D108BD9-81ED-4DB2-BD59-A6C34878D82A}">
                     <a16:rowId xmlns:a16="http://schemas.microsoft.com/office/drawing/2014/main" val="10000"/>
-                  </a:ext>
-                </a:extLst>
-              </a:tr>
-              <a:tr h="548640">
-                <a:tc>
-                  <a:txBody>
-                    <a:bodyPr/>
-                    <a:lstStyle/>
-                    <a:p>
-                      <a:endParaRPr/>
-                    </a:p>
-                  </a:txBody>
-                  <a:tcPr/>
-                </a:tc>
-                <a:tc>
-                  <a:txBody>
-                    <a:bodyPr/>
-                    <a:lstStyle/>
-                    <a:p>
-                      <a:endParaRPr/>
-                    </a:p>
-                  </a:txBody>
-                  <a:tcPr/>
-                </a:tc>
-                <a:tc>
-                  <a:txBody>
-                    <a:bodyPr/>
-                    <a:lstStyle/>
-                    <a:p>
-                      <a:endParaRPr/>
-                    </a:p>
-                  </a:txBody>
-                  <a:tcPr/>
-                </a:tc>
-                <a:tc>
-                  <a:txBody>
-                    <a:bodyPr/>
-                    <a:lstStyle/>
-                    <a:p>
-                      <a:endParaRPr/>
-                    </a:p>
-                  </a:txBody>
-                  <a:tcPr/>
-                </a:tc>
-                <a:tc>
-                  <a:txBody>
-                    <a:bodyPr/>
-                    <a:lstStyle/>
-                    <a:p>
-                      <a:endParaRPr/>
-                    </a:p>
-                  </a:txBody>
-                  <a:tcPr/>
-                </a:tc>
-                <a:tc>
-                  <a:txBody>
-                    <a:bodyPr/>
-                    <a:lstStyle/>
-                    <a:p>
-                      <a:endParaRPr/>
-                    </a:p>
-                  </a:txBody>
-                  <a:tcPr/>
-                </a:tc>
-                <a:extLst>
-                  <a:ext uri="{0D108BD9-81ED-4DB2-BD59-A6C34878D82A}">
-                    <a16:rowId xmlns:a16="http://schemas.microsoft.com/office/drawing/2014/main" val="10001"/>
                   </a:ext>
                 </a:extLst>
               </a:tr>
@@ -12563,8 +12617,8 @@
           </a:p>
         </p:txBody>
       </p:sp>
-      <mc:AlternateContent xmlns:mc="http://schemas.openxmlformats.org/markup-compatibility/2006">
-        <mc:Choice xmlns:a14="http://schemas.microsoft.com/office/drawing/2010/main" Requires="a14">
+      <mc:AlternateContent xmlns:mc="http://schemas.openxmlformats.org/markup-compatibility/2006" xmlns:a14="http://schemas.microsoft.com/office/drawing/2010/main">
+        <mc:Choice Requires="a14">
           <p:sp>
             <p:nvSpPr>
               <p:cNvPr id="6" name="TextBox 5"/>
@@ -12664,11 +12718,12 @@
                     </m:oMath>
                   </m:oMathPara>
                 </a14:m>
+                <a:endParaRPr/>
               </a:p>
             </p:txBody>
           </p:sp>
         </mc:Choice>
-        <mc:Fallback>
+        <mc:Fallback xmlns="">
           <p:sp>
             <p:nvSpPr>
               <p:cNvPr id="6" name="TextBox 5"/>
@@ -12749,92 +12804,49 @@
           </a:p>
         </p:txBody>
       </p:sp>
-      <mc:AlternateContent xmlns:mc="http://schemas.openxmlformats.org/markup-compatibility/2006">
-        <mc:Choice xmlns:a14="http://schemas.microsoft.com/office/drawing/2010/main" Requires="a14">
-          <p:sp>
-            <p:nvSpPr>
-              <p:cNvPr id="8" name="TextBox 7"/>
-              <p:cNvSpPr txBox="1"/>
-              <p:nvPr/>
-            </p:nvSpPr>
-            <p:spPr>
-              <a:xfrm>
-                <a:off x="1280160" y="3200400"/>
-                <a:ext cx="4114800" cy="553998"/>
-              </a:xfrm>
-              <a:prstGeom prst="rect">
-                <a:avLst/>
-              </a:prstGeom>
-              <a:noFill/>
-            </p:spPr>
-            <p:txBody>
-              <a:bodyPr wrap="square">
-                <a:spAutoFit/>
-              </a:bodyPr>
-              <a:lstStyle/>
-              <a:p>
-                <a:pPr algn="l">
-                  <a:defRPr sz="1500" b="0">
-                    <a:solidFill>
-                      <a:srgbClr val="CCCCCC"/>
-                    </a:solidFill>
-                    <a:latin typeface="微软雅黑"/>
-                  </a:defRPr>
-                </a:pPr>
-                <a14:m/>
-                <a:br>
-                  <a:rPr lang="en-US" i="1" dirty="0">
-                    <a:latin typeface="Cambria Math" panose="02040503050406030204" pitchFamily="18" charset="0"/>
-                  </a:rPr>
-                </a:br>
-                <a:r>
-                  <a:rPr dirty="0" err="1"/>
-                  <a:t>同时衡量成功率和路径效率</a:t>
-                </a:r>
-                <a:endParaRPr dirty="0"/>
-              </a:p>
-            </p:txBody>
-          </p:sp>
-        </mc:Choice>
-        <mc:Fallback>
-          <p:sp>
-            <p:nvSpPr>
-              <p:cNvPr id="8" name="TextBox 7"/>
-              <p:cNvSpPr txBox="1">
-                <a:spLocks noRot="1" noChangeAspect="1" noMove="1" noResize="1" noEditPoints="1" noAdjustHandles="1" noChangeArrowheads="1" noChangeShapeType="1" noTextEdit="1"/>
-              </p:cNvSpPr>
-              <p:nvPr/>
-            </p:nvSpPr>
-            <p:spPr>
-              <a:xfrm>
-                <a:off x="1280160" y="3200400"/>
-                <a:ext cx="4114800" cy="553998"/>
-              </a:xfrm>
-              <a:prstGeom prst="rect">
-                <a:avLst/>
-              </a:prstGeom>
-              <a:blipFill>
-                <a:blip r:embed="rId3"/>
-                <a:stretch>
-                  <a:fillRect l="-593" b="-10989"/>
-                </a:stretch>
-              </a:blipFill>
-            </p:spPr>
-            <p:txBody>
-              <a:bodyPr/>
-              <a:lstStyle/>
-              <a:p>
-                <a:r>
-                  <a:rPr lang="zh-CN" altLang="en-US">
-                    <a:noFill/>
-                  </a:rPr>
-                  <a:t> </a:t>
-                </a:r>
-              </a:p>
-            </p:txBody>
-          </p:sp>
-        </mc:Fallback>
-      </mc:AlternateContent>
+      <p:sp>
+        <p:nvSpPr>
+          <p:cNvPr id="8" name="TextBox 7"/>
+          <p:cNvSpPr txBox="1"/>
+          <p:nvPr/>
+        </p:nvSpPr>
+        <p:spPr>
+          <a:xfrm>
+            <a:off x="2081309" y="3014841"/>
+            <a:ext cx="4114800" cy="553998"/>
+          </a:xfrm>
+          <a:prstGeom prst="rect">
+            <a:avLst/>
+          </a:prstGeom>
+          <a:noFill/>
+        </p:spPr>
+        <p:txBody>
+          <a:bodyPr wrap="square">
+            <a:spAutoFit/>
+          </a:bodyPr>
+          <a:lstStyle/>
+          <a:p>
+            <a:pPr algn="l">
+              <a:defRPr sz="1500" b="0">
+                <a:solidFill>
+                  <a:srgbClr val="CCCCCC"/>
+                </a:solidFill>
+                <a:latin typeface="微软雅黑"/>
+              </a:defRPr>
+            </a:pPr>
+            <a:br>
+              <a:rPr lang="en-US" i="1" dirty="0">
+                <a:latin typeface="Cambria Math" panose="02040503050406030204" pitchFamily="18" charset="0"/>
+              </a:rPr>
+            </a:br>
+            <a:r>
+              <a:rPr dirty="0" err="1"/>
+              <a:t>同时衡量成功率和路径效率</a:t>
+            </a:r>
+            <a:endParaRPr dirty="0"/>
+          </a:p>
+        </p:txBody>
+      </p:sp>
       <p:sp>
         <p:nvSpPr>
           <p:cNvPr id="9" name="Rounded Rectangle 8"/>
